--- a/sample/showcase.pptx
+++ b/sample/showcase.pptx
@@ -21,6 +21,18 @@
     <p:sldId id="266" r:id="rId19"/>
     <p:sldId id="267" r:id="rId20"/>
     <p:sldId id="268" r:id="rId21"/>
+    <p:sldId id="269" r:id="rId22"/>
+    <p:sldId id="270" r:id="rId23"/>
+    <p:sldId id="271" r:id="rId24"/>
+    <p:sldId id="272" r:id="rId25"/>
+    <p:sldId id="273" r:id="rId26"/>
+    <p:sldId id="274" r:id="rId27"/>
+    <p:sldId id="275" r:id="rId28"/>
+    <p:sldId id="276" r:id="rId29"/>
+    <p:sldId id="277" r:id="rId30"/>
+    <p:sldId id="278" r:id="rId31"/>
+    <p:sldId id="279" r:id="rId32"/>
+    <p:sldId id="280" r:id="rId33"/>
   </p:sldIdLst>
   <p:sldSz cx="12192000" cy="6858000"/>
   <p:notesSz cx="6858000" cy="9144000"/>
@@ -550,1087 +562,7 @@
           <a:lstStyle/>
           <a:p>
             <a:r>
-              <a:t>Features shown:</a:t>
-            </a:r>
-          </a:p>
-          <a:p>
-            <a:r>
-              <a:t>- Title Slide layout selected in slide front matter.</a:t>
-            </a:r>
-          </a:p>
-          <a:p>
-            <a:r>
-              <a:t>- H1 slide title mapped to the title placeholder.</a:t>
-            </a:r>
-          </a:p>
-          <a:p>
-            <a:r>
-              <a:t>- Body text mapped to the subtitle placeholder.</a:t>
-            </a:r>
-          </a:p>
-          <a:p>
-            <a:r>
-              <a:t>- Deck-level front matter for aspect ratio, fonts, color scheme, and a document linear-gradient background.</a:t>
-            </a:r>
-          </a:p>
-          <a:p>
-            <a:r>
-              <a:t>- Theme color references inside gradients via var(--accent-1) style syntax.</a:t>
-            </a:r>
-          </a:p>
-          <a:p>
-            <a:r>
-              <a:t>- Speaker notes stored from slide front matter.</a:t>
-            </a:r>
-          </a:p>
-        </p:txBody>
-      </p:sp>
-      <p:sp>
-        <p:nvSpPr>
-          <p:cNvPr id="4" name="Slide Number Placeholder 3"/>
-          <p:cNvSpPr>
-            <a:spLocks noGrp="1"/>
-          </p:cNvSpPr>
-          <p:nvPr>
-            <p:ph type="sldNum" idx="5" sz="quarter"/>
-          </p:nvPr>
-        </p:nvSpPr>
-        <p:spPr/>
-      </p:sp>
-    </p:spTree>
-  </p:cSld>
-  <p:clrMapOvr>
-    <a:masterClrMapping/>
-  </p:clrMapOvr>
-</p:notes>
-</file>
-
-<file path=ppt/notesSlides/notesSlide10.xml><?xml version="1.0" encoding="utf-8"?>
-<p:notes xmlns:a="http://schemas.openxmlformats.org/drawingml/2006/main" xmlns:p="http://schemas.openxmlformats.org/presentationml/2006/main" xmlns:r="http://schemas.openxmlformats.org/officeDocument/2006/relationships">
-  <p:cSld>
-    <p:spTree>
-      <p:nvGrpSpPr>
-        <p:cNvPr id="1" name=""/>
-        <p:cNvGrpSpPr/>
-        <p:nvPr/>
-      </p:nvGrpSpPr>
-      <p:grpSpPr>
-        <a:xfrm>
-          <a:off x="0" y="0"/>
-          <a:ext cx="0" cy="0"/>
-          <a:chOff x="0" y="0"/>
-          <a:chExt cx="0" cy="0"/>
-        </a:xfrm>
-      </p:grpSpPr>
-      <p:sp>
-        <p:nvSpPr>
-          <p:cNvPr id="2" name="Slide Image Placeholder 1"/>
-          <p:cNvSpPr>
-            <a:spLocks noGrp="1"/>
-          </p:cNvSpPr>
-          <p:nvPr>
-            <p:ph type="sldImg" idx="2"/>
-          </p:nvPr>
-        </p:nvSpPr>
-        <p:spPr/>
-      </p:sp>
-      <p:sp>
-        <p:nvSpPr>
-          <p:cNvPr id="3" name="Notes Placeholder 2"/>
-          <p:cNvSpPr>
-            <a:spLocks noGrp="1"/>
-          </p:cNvSpPr>
-          <p:nvPr>
-            <p:ph type="body" idx="3" sz="quarter"/>
-          </p:nvPr>
-        </p:nvSpPr>
-        <p:spPr/>
-        <p:txBody>
-          <a:bodyPr/>
-          <a:lstStyle/>
-          <a:p>
-            <a:r>
-              <a:t>Features shown:</a:t>
-            </a:r>
-          </a:p>
-          <a:p>
-            <a:r>
-              <a:t>- Remote image download at render time.</a:t>
-            </a:r>
-          </a:p>
-          <a:p>
-            <a:r>
-              <a:t>- Downloaded image embedded directly into the PPTX.</a:t>
-            </a:r>
-          </a:p>
-          <a:p>
-            <a:r>
-              <a:t>- Image-only content rendered in the content region.</a:t>
-            </a:r>
-          </a:p>
-        </p:txBody>
-      </p:sp>
-      <p:sp>
-        <p:nvSpPr>
-          <p:cNvPr id="4" name="Slide Number Placeholder 3"/>
-          <p:cNvSpPr>
-            <a:spLocks noGrp="1"/>
-          </p:cNvSpPr>
-          <p:nvPr>
-            <p:ph type="sldNum" idx="5" sz="quarter"/>
-          </p:nvPr>
-        </p:nvSpPr>
-        <p:spPr/>
-      </p:sp>
-    </p:spTree>
-  </p:cSld>
-  <p:clrMapOvr>
-    <a:masterClrMapping/>
-  </p:clrMapOvr>
-</p:notes>
-</file>
-
-<file path=ppt/notesSlides/notesSlide11.xml><?xml version="1.0" encoding="utf-8"?>
-<p:notes xmlns:a="http://schemas.openxmlformats.org/drawingml/2006/main" xmlns:p="http://schemas.openxmlformats.org/presentationml/2006/main" xmlns:r="http://schemas.openxmlformats.org/officeDocument/2006/relationships">
-  <p:cSld>
-    <p:spTree>
-      <p:nvGrpSpPr>
-        <p:cNvPr id="1" name=""/>
-        <p:cNvGrpSpPr/>
-        <p:nvPr/>
-      </p:nvGrpSpPr>
-      <p:grpSpPr>
-        <a:xfrm>
-          <a:off x="0" y="0"/>
-          <a:ext cx="0" cy="0"/>
-          <a:chOff x="0" y="0"/>
-          <a:chExt cx="0" cy="0"/>
-        </a:xfrm>
-      </p:grpSpPr>
-      <p:sp>
-        <p:nvSpPr>
-          <p:cNvPr id="2" name="Slide Image Placeholder 1"/>
-          <p:cNvSpPr>
-            <a:spLocks noGrp="1"/>
-          </p:cNvSpPr>
-          <p:nvPr>
-            <p:ph type="sldImg" idx="2"/>
-          </p:nvPr>
-        </p:nvSpPr>
-        <p:spPr/>
-      </p:sp>
-      <p:sp>
-        <p:nvSpPr>
-          <p:cNvPr id="3" name="Notes Placeholder 2"/>
-          <p:cNvSpPr>
-            <a:spLocks noGrp="1"/>
-          </p:cNvSpPr>
-          <p:nvPr>
-            <p:ph type="body" idx="3" sz="quarter"/>
-          </p:nvPr>
-        </p:nvSpPr>
-        <p:spPr/>
-        <p:txBody>
-          <a:bodyPr/>
-          <a:lstStyle/>
-          <a:p>
-            <a:r>
-              <a:t>Features shown:</a:t>
-            </a:r>
-          </a:p>
-          <a:p>
-            <a:r>
-              <a:t>- Slide-level radial-gradient background override.</a:t>
-            </a:r>
-          </a:p>
-          <a:p>
-            <a:r>
-              <a:t>- Radial gradients use the constrained gradient syntax supported by the parser.</a:t>
-            </a:r>
-          </a:p>
-          <a:p>
-            <a:r>
-              <a:t>- Gradient stops can reference theme colors via var(--theme-slot).</a:t>
-            </a:r>
-          </a:p>
-          <a:p>
-            <a:r>
-              <a:t>- Content still uses the standard title and body placeholders.</a:t>
-            </a:r>
-          </a:p>
-        </p:txBody>
-      </p:sp>
-      <p:sp>
-        <p:nvSpPr>
-          <p:cNvPr id="4" name="Slide Number Placeholder 3"/>
-          <p:cNvSpPr>
-            <a:spLocks noGrp="1"/>
-          </p:cNvSpPr>
-          <p:nvPr>
-            <p:ph type="sldNum" idx="5" sz="quarter"/>
-          </p:nvPr>
-        </p:nvSpPr>
-        <p:spPr/>
-      </p:sp>
-    </p:spTree>
-  </p:cSld>
-  <p:clrMapOvr>
-    <a:masterClrMapping/>
-  </p:clrMapOvr>
-</p:notes>
-</file>
-
-<file path=ppt/notesSlides/notesSlide12.xml><?xml version="1.0" encoding="utf-8"?>
-<p:notes xmlns:a="http://schemas.openxmlformats.org/drawingml/2006/main" xmlns:p="http://schemas.openxmlformats.org/presentationml/2006/main" xmlns:r="http://schemas.openxmlformats.org/officeDocument/2006/relationships">
-  <p:cSld>
-    <p:spTree>
-      <p:nvGrpSpPr>
-        <p:cNvPr id="1" name=""/>
-        <p:cNvGrpSpPr/>
-        <p:nvPr/>
-      </p:nvGrpSpPr>
-      <p:grpSpPr>
-        <a:xfrm>
-          <a:off x="0" y="0"/>
-          <a:ext cx="0" cy="0"/>
-          <a:chOff x="0" y="0"/>
-          <a:chExt cx="0" cy="0"/>
-        </a:xfrm>
-      </p:grpSpPr>
-      <p:sp>
-        <p:nvSpPr>
-          <p:cNvPr id="2" name="Slide Image Placeholder 1"/>
-          <p:cNvSpPr>
-            <a:spLocks noGrp="1"/>
-          </p:cNvSpPr>
-          <p:nvPr>
-            <p:ph type="sldImg" idx="2"/>
-          </p:nvPr>
-        </p:nvSpPr>
-        <p:spPr/>
-      </p:sp>
-      <p:sp>
-        <p:nvSpPr>
-          <p:cNvPr id="3" name="Notes Placeholder 2"/>
-          <p:cNvSpPr>
-            <a:spLocks noGrp="1"/>
-          </p:cNvSpPr>
-          <p:nvPr>
-            <p:ph type="body" idx="3" sz="quarter"/>
-          </p:nvPr>
-        </p:nvSpPr>
-        <p:spPr/>
-        <p:txBody>
-          <a:bodyPr/>
-          <a:lstStyle/>
-          <a:p>
-            <a:r>
-              <a:t>Features shown:</a:t>
-            </a:r>
-          </a:p>
-          <a:p>
-            <a:r>
-              <a:t>- background: none to remove explicit slide fill.</a:t>
-            </a:r>
-          </a:p>
-          <a:p>
-            <a:r>
-              <a:t>- hide_background_graphics: true to disable inherited master graphics.</a:t>
-            </a:r>
-          </a:p>
-          <a:p>
-            <a:r>
-              <a:t>- Title Only layout with title text only.</a:t>
-            </a:r>
-          </a:p>
-        </p:txBody>
-      </p:sp>
-      <p:sp>
-        <p:nvSpPr>
-          <p:cNvPr id="4" name="Slide Number Placeholder 3"/>
-          <p:cNvSpPr>
-            <a:spLocks noGrp="1"/>
-          </p:cNvSpPr>
-          <p:nvPr>
-            <p:ph type="sldNum" idx="5" sz="quarter"/>
-          </p:nvPr>
-        </p:nvSpPr>
-        <p:spPr/>
-      </p:sp>
-    </p:spTree>
-  </p:cSld>
-  <p:clrMapOvr>
-    <a:masterClrMapping/>
-  </p:clrMapOvr>
-</p:notes>
-</file>
-
-<file path=ppt/notesSlides/notesSlide13.xml><?xml version="1.0" encoding="utf-8"?>
-<p:notes xmlns:a="http://schemas.openxmlformats.org/drawingml/2006/main" xmlns:p="http://schemas.openxmlformats.org/presentationml/2006/main" xmlns:r="http://schemas.openxmlformats.org/officeDocument/2006/relationships">
-  <p:cSld>
-    <p:spTree>
-      <p:nvGrpSpPr>
-        <p:cNvPr id="1" name=""/>
-        <p:cNvGrpSpPr/>
-        <p:nvPr/>
-      </p:nvGrpSpPr>
-      <p:grpSpPr>
-        <a:xfrm>
-          <a:off x="0" y="0"/>
-          <a:ext cx="0" cy="0"/>
-          <a:chOff x="0" y="0"/>
-          <a:chExt cx="0" cy="0"/>
-        </a:xfrm>
-      </p:grpSpPr>
-      <p:sp>
-        <p:nvSpPr>
-          <p:cNvPr id="2" name="Slide Image Placeholder 1"/>
-          <p:cNvSpPr>
-            <a:spLocks noGrp="1"/>
-          </p:cNvSpPr>
-          <p:nvPr>
-            <p:ph type="sldImg" idx="2"/>
-          </p:nvPr>
-        </p:nvSpPr>
-        <p:spPr/>
-      </p:sp>
-      <p:sp>
-        <p:nvSpPr>
-          <p:cNvPr id="3" name="Notes Placeholder 2"/>
-          <p:cNvSpPr>
-            <a:spLocks noGrp="1"/>
-          </p:cNvSpPr>
-          <p:nvPr>
-            <p:ph type="body" idx="3" sz="quarter"/>
-          </p:nvPr>
-        </p:nvSpPr>
-        <p:spPr/>
-        <p:txBody>
-          <a:bodyPr/>
-          <a:lstStyle/>
-          <a:p>
-            <a:r>
-              <a:t>Features shown:</a:t>
-            </a:r>
-          </a:p>
-          <a:p>
-            <a:r>
-              <a:t>- Blank layout selected explicitly.</a:t>
-            </a:r>
-          </a:p>
-          <a:p>
-            <a:r>
-              <a:t>- Empty H1 title and empty body satisfy blank slide validation rules.</a:t>
-            </a:r>
-          </a:p>
-          <a:p>
-            <a:r>
-              <a:t>- Notes can still carry metadata even when the visible slide is empty.</a:t>
-            </a:r>
-          </a:p>
-        </p:txBody>
-      </p:sp>
-      <p:sp>
-        <p:nvSpPr>
-          <p:cNvPr id="4" name="Slide Number Placeholder 3"/>
-          <p:cNvSpPr>
-            <a:spLocks noGrp="1"/>
-          </p:cNvSpPr>
-          <p:nvPr>
-            <p:ph type="sldNum" idx="5" sz="quarter"/>
-          </p:nvPr>
-        </p:nvSpPr>
-        <p:spPr/>
-      </p:sp>
-    </p:spTree>
-  </p:cSld>
-  <p:clrMapOvr>
-    <a:masterClrMapping/>
-  </p:clrMapOvr>
-</p:notes>
-</file>
-
-<file path=ppt/notesSlides/notesSlide2.xml><?xml version="1.0" encoding="utf-8"?>
-<p:notes xmlns:a="http://schemas.openxmlformats.org/drawingml/2006/main" xmlns:p="http://schemas.openxmlformats.org/presentationml/2006/main" xmlns:r="http://schemas.openxmlformats.org/officeDocument/2006/relationships">
-  <p:cSld>
-    <p:spTree>
-      <p:nvGrpSpPr>
-        <p:cNvPr id="1" name=""/>
-        <p:cNvGrpSpPr/>
-        <p:nvPr/>
-      </p:nvGrpSpPr>
-      <p:grpSpPr>
-        <a:xfrm>
-          <a:off x="0" y="0"/>
-          <a:ext cx="0" cy="0"/>
-          <a:chOff x="0" y="0"/>
-          <a:chExt cx="0" cy="0"/>
-        </a:xfrm>
-      </p:grpSpPr>
-      <p:sp>
-        <p:nvSpPr>
-          <p:cNvPr id="2" name="Slide Image Placeholder 1"/>
-          <p:cNvSpPr>
-            <a:spLocks noGrp="1"/>
-          </p:cNvSpPr>
-          <p:nvPr>
-            <p:ph type="sldImg" idx="2"/>
-          </p:nvPr>
-        </p:nvSpPr>
-        <p:spPr/>
-      </p:sp>
-      <p:sp>
-        <p:nvSpPr>
-          <p:cNvPr id="3" name="Notes Placeholder 2"/>
-          <p:cNvSpPr>
-            <a:spLocks noGrp="1"/>
-          </p:cNvSpPr>
-          <p:nvPr>
-            <p:ph type="body" idx="3" sz="quarter"/>
-          </p:nvPr>
-        </p:nvSpPr>
-        <p:spPr/>
-        <p:txBody>
-          <a:bodyPr/>
-          <a:lstStyle/>
-          <a:p>
-            <a:r>
-              <a:t>Features shown:</a:t>
-            </a:r>
-          </a:p>
-          <a:p>
-            <a:r>
-              <a:t>- Section Header layout selected in slide front matter.</a:t>
-            </a:r>
-          </a:p>
-          <a:p>
-            <a:r>
-              <a:t>- Slide-level gradient background override using restricted CSS-like syntax.</a:t>
-            </a:r>
-          </a:p>
-          <a:p>
-            <a:r>
-              <a:t>- Body content mapped to the subtitle/body placeholder for this layout.</a:t>
-            </a:r>
-          </a:p>
-          <a:p>
-            <a:r>
-              <a:t>- Title uses the Headings font from deck front matter.</a:t>
-            </a:r>
-          </a:p>
-        </p:txBody>
-      </p:sp>
-      <p:sp>
-        <p:nvSpPr>
-          <p:cNvPr id="4" name="Slide Number Placeholder 3"/>
-          <p:cNvSpPr>
-            <a:spLocks noGrp="1"/>
-          </p:cNvSpPr>
-          <p:nvPr>
-            <p:ph type="sldNum" idx="5" sz="quarter"/>
-          </p:nvPr>
-        </p:nvSpPr>
-        <p:spPr/>
-      </p:sp>
-    </p:spTree>
-  </p:cSld>
-  <p:clrMapOvr>
-    <a:masterClrMapping/>
-  </p:clrMapOvr>
-</p:notes>
-</file>
-
-<file path=ppt/notesSlides/notesSlide3.xml><?xml version="1.0" encoding="utf-8"?>
-<p:notes xmlns:a="http://schemas.openxmlformats.org/drawingml/2006/main" xmlns:p="http://schemas.openxmlformats.org/presentationml/2006/main" xmlns:r="http://schemas.openxmlformats.org/officeDocument/2006/relationships">
-  <p:cSld>
-    <p:spTree>
-      <p:nvGrpSpPr>
-        <p:cNvPr id="1" name=""/>
-        <p:cNvGrpSpPr/>
-        <p:nvPr/>
-      </p:nvGrpSpPr>
-      <p:grpSpPr>
-        <a:xfrm>
-          <a:off x="0" y="0"/>
-          <a:ext cx="0" cy="0"/>
-          <a:chOff x="0" y="0"/>
-          <a:chExt cx="0" cy="0"/>
-        </a:xfrm>
-      </p:grpSpPr>
-      <p:sp>
-        <p:nvSpPr>
-          <p:cNvPr id="2" name="Slide Image Placeholder 1"/>
-          <p:cNvSpPr>
-            <a:spLocks noGrp="1"/>
-          </p:cNvSpPr>
-          <p:nvPr>
-            <p:ph type="sldImg" idx="2"/>
-          </p:nvPr>
-        </p:nvSpPr>
-        <p:spPr/>
-      </p:sp>
-      <p:sp>
-        <p:nvSpPr>
-          <p:cNvPr id="3" name="Notes Placeholder 2"/>
-          <p:cNvSpPr>
-            <a:spLocks noGrp="1"/>
-          </p:cNvSpPr>
-          <p:nvPr>
-            <p:ph type="body" idx="3" sz="quarter"/>
-          </p:nvPr>
-        </p:nvSpPr>
-        <p:spPr/>
-        <p:txBody>
-          <a:bodyPr/>
-          <a:lstStyle/>
-          <a:p>
-            <a:r>
-              <a:t>Features shown:</a:t>
-            </a:r>
-          </a:p>
-          <a:p>
-            <a:r>
-              <a:t>- Default Title and Content layout.</a:t>
-            </a:r>
-          </a:p>
-          <a:p>
-            <a:r>
-              <a:t>- Slide-level title_color and body_color overrides for placeholder text.</a:t>
-            </a:r>
-          </a:p>
-          <a:p>
-            <a:r>
-              <a:t>- Theme color references for placeholder text using var(--theme-slot) syntax.</a:t>
-            </a:r>
-          </a:p>
-          <a:p>
-            <a:r>
-              <a:t>- Standard paragraphs in the body placeholder.</a:t>
-            </a:r>
-          </a:p>
-          <a:p>
-            <a:r>
-              <a:t>- Inline strong, emphasis, and inline code formatting.</a:t>
-            </a:r>
-          </a:p>
-          <a:p>
-            <a:r>
-              <a:t>- Markdown links rendered inside text flow.</a:t>
-            </a:r>
-          </a:p>
-          <a:p>
-            <a:r>
-              <a:t>- Deck-level Body and Headings font settings.</a:t>
-            </a:r>
-          </a:p>
-        </p:txBody>
-      </p:sp>
-      <p:sp>
-        <p:nvSpPr>
-          <p:cNvPr id="4" name="Slide Number Placeholder 3"/>
-          <p:cNvSpPr>
-            <a:spLocks noGrp="1"/>
-          </p:cNvSpPr>
-          <p:nvPr>
-            <p:ph type="sldNum" idx="5" sz="quarter"/>
-          </p:nvPr>
-        </p:nvSpPr>
-        <p:spPr/>
-      </p:sp>
-    </p:spTree>
-  </p:cSld>
-  <p:clrMapOvr>
-    <a:masterClrMapping/>
-  </p:clrMapOvr>
-</p:notes>
-</file>
-
-<file path=ppt/notesSlides/notesSlide4.xml><?xml version="1.0" encoding="utf-8"?>
-<p:notes xmlns:a="http://schemas.openxmlformats.org/drawingml/2006/main" xmlns:p="http://schemas.openxmlformats.org/presentationml/2006/main" xmlns:r="http://schemas.openxmlformats.org/officeDocument/2006/relationships">
-  <p:cSld>
-    <p:spTree>
-      <p:nvGrpSpPr>
-        <p:cNvPr id="1" name=""/>
-        <p:cNvGrpSpPr/>
-        <p:nvPr/>
-      </p:nvGrpSpPr>
-      <p:grpSpPr>
-        <a:xfrm>
-          <a:off x="0" y="0"/>
-          <a:ext cx="0" cy="0"/>
-          <a:chOff x="0" y="0"/>
-          <a:chExt cx="0" cy="0"/>
-        </a:xfrm>
-      </p:grpSpPr>
-      <p:sp>
-        <p:nvSpPr>
-          <p:cNvPr id="2" name="Slide Image Placeholder 1"/>
-          <p:cNvSpPr>
-            <a:spLocks noGrp="1"/>
-          </p:cNvSpPr>
-          <p:nvPr>
-            <p:ph type="sldImg" idx="2"/>
-          </p:nvPr>
-        </p:nvSpPr>
-        <p:spPr/>
-      </p:sp>
-      <p:sp>
-        <p:nvSpPr>
-          <p:cNvPr id="3" name="Notes Placeholder 2"/>
-          <p:cNvSpPr>
-            <a:spLocks noGrp="1"/>
-          </p:cNvSpPr>
-          <p:nvPr>
-            <p:ph type="body" idx="3" sz="quarter"/>
-          </p:nvPr>
-        </p:nvSpPr>
-        <p:spPr/>
-        <p:txBody>
-          <a:bodyPr/>
-          <a:lstStyle/>
-          <a:p>
-            <a:r>
-              <a:t>Features shown:</a:t>
-            </a:r>
-          </a:p>
-          <a:p>
-            <a:r>
-              <a:t>- H2 through H6 stay within the current slide body instead of starting new slides.</a:t>
-            </a:r>
-          </a:p>
-          <a:p>
-            <a:r>
-              <a:t>- Body headings use the Headings font while body paragraphs use the Body font.</a:t>
-            </a:r>
-          </a:p>
-          <a:p>
-            <a:r>
-              <a:t>- Descending heading sizes are applied within one text-flow placeholder.</a:t>
-            </a:r>
-          </a:p>
-        </p:txBody>
-      </p:sp>
-      <p:sp>
-        <p:nvSpPr>
-          <p:cNvPr id="4" name="Slide Number Placeholder 3"/>
-          <p:cNvSpPr>
-            <a:spLocks noGrp="1"/>
-          </p:cNvSpPr>
-          <p:nvPr>
-            <p:ph type="sldNum" idx="5" sz="quarter"/>
-          </p:nvPr>
-        </p:nvSpPr>
-        <p:spPr/>
-      </p:sp>
-    </p:spTree>
-  </p:cSld>
-  <p:clrMapOvr>
-    <a:masterClrMapping/>
-  </p:clrMapOvr>
-</p:notes>
-</file>
-
-<file path=ppt/notesSlides/notesSlide5.xml><?xml version="1.0" encoding="utf-8"?>
-<p:notes xmlns:a="http://schemas.openxmlformats.org/drawingml/2006/main" xmlns:p="http://schemas.openxmlformats.org/presentationml/2006/main" xmlns:r="http://schemas.openxmlformats.org/officeDocument/2006/relationships">
-  <p:cSld>
-    <p:spTree>
-      <p:nvGrpSpPr>
-        <p:cNvPr id="1" name=""/>
-        <p:cNvGrpSpPr/>
-        <p:nvPr/>
-      </p:nvGrpSpPr>
-      <p:grpSpPr>
-        <a:xfrm>
-          <a:off x="0" y="0"/>
-          <a:ext cx="0" cy="0"/>
-          <a:chOff x="0" y="0"/>
-          <a:chExt cx="0" cy="0"/>
-        </a:xfrm>
-      </p:grpSpPr>
-      <p:sp>
-        <p:nvSpPr>
-          <p:cNvPr id="2" name="Slide Image Placeholder 1"/>
-          <p:cNvSpPr>
-            <a:spLocks noGrp="1"/>
-          </p:cNvSpPr>
-          <p:nvPr>
-            <p:ph type="sldImg" idx="2"/>
-          </p:nvPr>
-        </p:nvSpPr>
-        <p:spPr/>
-      </p:sp>
-      <p:sp>
-        <p:nvSpPr>
-          <p:cNvPr id="3" name="Notes Placeholder 2"/>
-          <p:cNvSpPr>
-            <a:spLocks noGrp="1"/>
-          </p:cNvSpPr>
-          <p:nvPr>
-            <p:ph type="body" idx="3" sz="quarter"/>
-          </p:nvPr>
-        </p:nvSpPr>
-        <p:spPr/>
-        <p:txBody>
-          <a:bodyPr/>
-          <a:lstStyle/>
-          <a:p>
-            <a:r>
-              <a:t>Features shown:</a:t>
-            </a:r>
-          </a:p>
-          <a:p>
-            <a:r>
-              <a:t>- Unordered lists and ordered lists in the same Title and Content slide.</a:t>
-            </a:r>
-          </a:p>
-          <a:p>
-            <a:r>
-              <a:t>- Nested list support up to three levels.</a:t>
-            </a:r>
-          </a:p>
-          <a:p>
-            <a:r>
-              <a:t>- List content stays in text flow inside the body placeholder.</a:t>
-            </a:r>
-          </a:p>
-        </p:txBody>
-      </p:sp>
-      <p:sp>
-        <p:nvSpPr>
-          <p:cNvPr id="4" name="Slide Number Placeholder 3"/>
-          <p:cNvSpPr>
-            <a:spLocks noGrp="1"/>
-          </p:cNvSpPr>
-          <p:nvPr>
-            <p:ph type="sldNum" idx="5" sz="quarter"/>
-          </p:nvPr>
-        </p:nvSpPr>
-        <p:spPr/>
-      </p:sp>
-    </p:spTree>
-  </p:cSld>
-  <p:clrMapOvr>
-    <a:masterClrMapping/>
-  </p:clrMapOvr>
-</p:notes>
-</file>
-
-<file path=ppt/notesSlides/notesSlide6.xml><?xml version="1.0" encoding="utf-8"?>
-<p:notes xmlns:a="http://schemas.openxmlformats.org/drawingml/2006/main" xmlns:p="http://schemas.openxmlformats.org/presentationml/2006/main" xmlns:r="http://schemas.openxmlformats.org/officeDocument/2006/relationships">
-  <p:cSld>
-    <p:spTree>
-      <p:nvGrpSpPr>
-        <p:cNvPr id="1" name=""/>
-        <p:cNvGrpSpPr/>
-        <p:nvPr/>
-      </p:nvGrpSpPr>
-      <p:grpSpPr>
-        <a:xfrm>
-          <a:off x="0" y="0"/>
-          <a:ext cx="0" cy="0"/>
-          <a:chOff x="0" y="0"/>
-          <a:chExt cx="0" cy="0"/>
-        </a:xfrm>
-      </p:grpSpPr>
-      <p:sp>
-        <p:nvSpPr>
-          <p:cNvPr id="2" name="Slide Image Placeholder 1"/>
-          <p:cNvSpPr>
-            <a:spLocks noGrp="1"/>
-          </p:cNvSpPr>
-          <p:nvPr>
-            <p:ph type="sldImg" idx="2"/>
-          </p:nvPr>
-        </p:nvSpPr>
-        <p:spPr/>
-      </p:sp>
-      <p:sp>
-        <p:nvSpPr>
-          <p:cNvPr id="3" name="Notes Placeholder 2"/>
-          <p:cNvSpPr>
-            <a:spLocks noGrp="1"/>
-          </p:cNvSpPr>
-          <p:nvPr>
-            <p:ph type="body" idx="3" sz="quarter"/>
-          </p:nvPr>
-        </p:nvSpPr>
-        <p:spPr/>
-        <p:txBody>
-          <a:bodyPr/>
-          <a:lstStyle/>
-          <a:p>
-            <a:r>
-              <a:t>Features shown:</a:t>
-            </a:r>
-          </a:p>
-          <a:p>
-            <a:r>
-              <a:t>- Blockquote rendered as text-flow content.</a:t>
-            </a:r>
-          </a:p>
-          <a:p>
-            <a:r>
-              <a:t>- Fenced code block rendering in the body placeholder.</a:t>
-            </a:r>
-          </a:p>
-          <a:p>
-            <a:r>
-              <a:t>- Indented code blocks are intentionally unsupported by the parser.</a:t>
-            </a:r>
-          </a:p>
-        </p:txBody>
-      </p:sp>
-      <p:sp>
-        <p:nvSpPr>
-          <p:cNvPr id="4" name="Slide Number Placeholder 3"/>
-          <p:cNvSpPr>
-            <a:spLocks noGrp="1"/>
-          </p:cNvSpPr>
-          <p:nvPr>
-            <p:ph type="sldNum" idx="5" sz="quarter"/>
-          </p:nvPr>
-        </p:nvSpPr>
-        <p:spPr/>
-      </p:sp>
-    </p:spTree>
-  </p:cSld>
-  <p:clrMapOvr>
-    <a:masterClrMapping/>
-  </p:clrMapOvr>
-</p:notes>
-</file>
-
-<file path=ppt/notesSlides/notesSlide7.xml><?xml version="1.0" encoding="utf-8"?>
-<p:notes xmlns:a="http://schemas.openxmlformats.org/drawingml/2006/main" xmlns:p="http://schemas.openxmlformats.org/presentationml/2006/main" xmlns:r="http://schemas.openxmlformats.org/officeDocument/2006/relationships">
-  <p:cSld>
-    <p:spTree>
-      <p:nvGrpSpPr>
-        <p:cNvPr id="1" name=""/>
-        <p:cNvGrpSpPr/>
-        <p:nvPr/>
-      </p:nvGrpSpPr>
-      <p:grpSpPr>
-        <a:xfrm>
-          <a:off x="0" y="0"/>
-          <a:ext cx="0" cy="0"/>
-          <a:chOff x="0" y="0"/>
-          <a:chExt cx="0" cy="0"/>
-        </a:xfrm>
-      </p:grpSpPr>
-      <p:sp>
-        <p:nvSpPr>
-          <p:cNvPr id="2" name="Slide Image Placeholder 1"/>
-          <p:cNvSpPr>
-            <a:spLocks noGrp="1"/>
-          </p:cNvSpPr>
-          <p:nvPr>
-            <p:ph type="sldImg" idx="2"/>
-          </p:nvPr>
-        </p:nvSpPr>
-        <p:spPr/>
-      </p:sp>
-      <p:sp>
-        <p:nvSpPr>
-          <p:cNvPr id="3" name="Notes Placeholder 2"/>
-          <p:cNvSpPr>
-            <a:spLocks noGrp="1"/>
-          </p:cNvSpPr>
-          <p:nvPr>
-            <p:ph type="body" idx="3" sz="quarter"/>
-          </p:nvPr>
-        </p:nvSpPr>
-        <p:spPr/>
-        <p:txBody>
-          <a:bodyPr/>
-          <a:lstStyle/>
-          <a:p>
-            <a:r>
-              <a:t>Features shown:</a:t>
-            </a:r>
-          </a:p>
-          <a:p>
-            <a:r>
-              <a:t>- Pipe table markdown support.</a:t>
-            </a:r>
-          </a:p>
-          <a:p>
-            <a:r>
-              <a:t>- Table rendered as a native PowerPoint table object.</a:t>
-            </a:r>
-          </a:p>
-          <a:p>
-            <a:r>
-              <a:t>- Content documents key parser and renderer rules.</a:t>
-            </a:r>
-          </a:p>
-        </p:txBody>
-      </p:sp>
-      <p:sp>
-        <p:nvSpPr>
-          <p:cNvPr id="4" name="Slide Number Placeholder 3"/>
-          <p:cNvSpPr>
-            <a:spLocks noGrp="1"/>
-          </p:cNvSpPr>
-          <p:nvPr>
-            <p:ph type="sldNum" idx="5" sz="quarter"/>
-          </p:nvPr>
-        </p:nvSpPr>
-        <p:spPr/>
-      </p:sp>
-    </p:spTree>
-  </p:cSld>
-  <p:clrMapOvr>
-    <a:masterClrMapping/>
-  </p:clrMapOvr>
-</p:notes>
-</file>
-
-<file path=ppt/notesSlides/notesSlide8.xml><?xml version="1.0" encoding="utf-8"?>
-<p:notes xmlns:a="http://schemas.openxmlformats.org/drawingml/2006/main" xmlns:p="http://schemas.openxmlformats.org/presentationml/2006/main" xmlns:r="http://schemas.openxmlformats.org/officeDocument/2006/relationships">
-  <p:cSld>
-    <p:spTree>
-      <p:nvGrpSpPr>
-        <p:cNvPr id="1" name=""/>
-        <p:cNvGrpSpPr/>
-        <p:nvPr/>
-      </p:nvGrpSpPr>
-      <p:grpSpPr>
-        <a:xfrm>
-          <a:off x="0" y="0"/>
-          <a:ext cx="0" cy="0"/>
-          <a:chOff x="0" y="0"/>
-          <a:chExt cx="0" cy="0"/>
-        </a:xfrm>
-      </p:grpSpPr>
-      <p:sp>
-        <p:nvSpPr>
-          <p:cNvPr id="2" name="Slide Image Placeholder 1"/>
-          <p:cNvSpPr>
-            <a:spLocks noGrp="1"/>
-          </p:cNvSpPr>
-          <p:nvPr>
-            <p:ph type="sldImg" idx="2"/>
-          </p:nvPr>
-        </p:nvSpPr>
-        <p:spPr/>
-      </p:sp>
-      <p:sp>
-        <p:nvSpPr>
-          <p:cNvPr id="3" name="Notes Placeholder 2"/>
-          <p:cNvSpPr>
-            <a:spLocks noGrp="1"/>
-          </p:cNvSpPr>
-          <p:nvPr>
-            <p:ph type="body" idx="3" sz="quarter"/>
-          </p:nvPr>
-        </p:nvSpPr>
-        <p:spPr/>
-        <p:txBody>
-          <a:bodyPr/>
-          <a:lstStyle/>
-          <a:p>
-            <a:r>
-              <a:t>Features shown:</a:t>
-            </a:r>
-          </a:p>
-          <a:p>
-            <a:r>
-              <a:t>- Local image path resolved relative to the markdown file.</a:t>
-            </a:r>
-          </a:p>
-          <a:p>
-            <a:r>
-              <a:t>- Standalone image paragraph rendered into the content region.</a:t>
-            </a:r>
-          </a:p>
-          <a:p>
-            <a:r>
-              <a:t>- The same local asset is later reused as a slide background image.</a:t>
-            </a:r>
-          </a:p>
-        </p:txBody>
-      </p:sp>
-      <p:sp>
-        <p:nvSpPr>
-          <p:cNvPr id="4" name="Slide Number Placeholder 3"/>
-          <p:cNvSpPr>
-            <a:spLocks noGrp="1"/>
-          </p:cNvSpPr>
-          <p:nvPr>
-            <p:ph type="sldNum" idx="5" sz="quarter"/>
-          </p:nvPr>
-        </p:nvSpPr>
-        <p:spPr/>
-      </p:sp>
-    </p:spTree>
-  </p:cSld>
-  <p:clrMapOvr>
-    <a:masterClrMapping/>
-  </p:clrMapOvr>
-</p:notes>
-</file>
-
-<file path=ppt/notesSlides/notesSlide9.xml><?xml version="1.0" encoding="utf-8"?>
-<p:notes xmlns:a="http://schemas.openxmlformats.org/drawingml/2006/main" xmlns:p="http://schemas.openxmlformats.org/presentationml/2006/main" xmlns:r="http://schemas.openxmlformats.org/officeDocument/2006/relationships">
-  <p:cSld>
-    <p:spTree>
-      <p:nvGrpSpPr>
-        <p:cNvPr id="1" name=""/>
-        <p:cNvGrpSpPr/>
-        <p:nvPr/>
-      </p:nvGrpSpPr>
-      <p:grpSpPr>
-        <a:xfrm>
-          <a:off x="0" y="0"/>
-          <a:ext cx="0" cy="0"/>
-          <a:chOff x="0" y="0"/>
-          <a:chExt cx="0" cy="0"/>
-        </a:xfrm>
-      </p:grpSpPr>
-      <p:sp>
-        <p:nvSpPr>
-          <p:cNvPr id="2" name="Slide Image Placeholder 1"/>
-          <p:cNvSpPr>
-            <a:spLocks noGrp="1"/>
-          </p:cNvSpPr>
-          <p:nvPr>
-            <p:ph type="sldImg" idx="2"/>
-          </p:nvPr>
-        </p:nvSpPr>
-        <p:spPr/>
-      </p:sp>
-      <p:sp>
-        <p:nvSpPr>
-          <p:cNvPr id="3" name="Notes Placeholder 2"/>
-          <p:cNvSpPr>
-            <a:spLocks noGrp="1"/>
-          </p:cNvSpPr>
-          <p:nvPr>
-            <p:ph type="body" idx="3" sz="quarter"/>
-          </p:nvPr>
-        </p:nvSpPr>
-        <p:spPr/>
-        <p:txBody>
-          <a:bodyPr/>
-          <a:lstStyle/>
-          <a:p>
-            <a:r>
-              <a:t>Features shown:</a:t>
-            </a:r>
-          </a:p>
-          <a:p>
-            <a:r>
-              <a:t>- Title Only layout selected in slide front matter.</a:t>
-            </a:r>
-          </a:p>
-          <a:p>
-            <a:r>
-              <a:t>- Slide-level background image using url(...) syntax.</a:t>
-            </a:r>
-          </a:p>
-          <a:p>
-            <a:r>
-              <a:t>- Title Only slide has no body content, matching the enforced layout rules.</a:t>
+              <a:t>This slide intentionally demonstrates the Blank layout.</a:t>
             </a:r>
           </a:p>
         </p:txBody>
@@ -4292,13 +3224,13 @@
         <a:gradFill rotWithShape="1">
           <a:gsLst>
             <a:gs pos="0">
-              <a:schemeClr val="lt1"/>
+              <a:srgbClr val="F3FAFF"/>
             </a:gs>
-            <a:gs pos="100000">
-              <a:schemeClr val="lt2"/>
+            <a:gs pos="54000">
+              <a:srgbClr val="E6F4FF"/>
             </a:gs>
           </a:gsLst>
-          <a:lin ang="16200000" scaled="0"/>
+          <a:lin scaled="0" ang="16200000"/>
         </a:gradFill>
         <a:effectLst/>
       </p:bgPr>
@@ -4893,21 +3825,21 @@
             <a:pPr>
               <a:defRPr>
                 <a:solidFill>
-                  <a:schemeClr val="dk1"/>
+                  <a:schemeClr val="accent6"/>
                 </a:solidFill>
               </a:defRPr>
             </a:pPr>
             <a:r>
               <a:rPr>
                 <a:solidFill>
-                  <a:schemeClr val="dk1"/>
-                </a:solidFill>
-              </a:rPr>
-              <a:t>markdown-slides showcase</a:t>
+                  <a:schemeClr val="accent6"/>
+                </a:solidFill>
+              </a:rPr>
+              <a:t>md-to-pptx</a:t>
             </a:r>
             <a:endParaRPr>
               <a:solidFill>
-                <a:schemeClr val="dk1"/>
+                <a:schemeClr val="accent6"/>
               </a:solidFill>
             </a:endParaRPr>
           </a:p>
@@ -4931,10 +3863,19 @@
           <a:lstStyle/>
           <a:p>
             <a:pPr marL="0" indent="0">
+              <a:lnSpc>
+                <a:spcPct val="100000"/>
+              </a:lnSpc>
+              <a:spcBef>
+                <a:spcPts val="1200"/>
+              </a:spcBef>
+              <a:spcAft>
+                <a:spcPts val="600"/>
+              </a:spcAft>
               <a:buNone/>
               <a:defRPr>
                 <a:solidFill>
-                  <a:schemeClr val="dk2"/>
+                  <a:schemeClr val="dk1"/>
                 </a:solidFill>
               </a:defRPr>
             </a:pPr>
@@ -4944,14 +3885,14 @@
                 <a:ea typeface="+mn-ea"/>
                 <a:cs typeface="+mn-cs"/>
                 <a:solidFill>
-                  <a:schemeClr val="dk2"/>
+                  <a:schemeClr val="dk1"/>
                 </a:solidFill>
               </a:rPr>
               <a:t>Markdown in. Editable PowerPoint out.</a:t>
             </a:r>
             <a:endParaRPr>
               <a:solidFill>
-                <a:schemeClr val="dk2"/>
+                <a:schemeClr val="dk1"/>
               </a:solidFill>
             </a:endParaRPr>
           </a:p>
@@ -4995,21 +3936,1226 @@
             <a:pPr>
               <a:defRPr>
                 <a:solidFill>
-                  <a:schemeClr val="dk1"/>
+                  <a:schemeClr val="accent6"/>
                 </a:solidFill>
               </a:defRPr>
             </a:pPr>
             <a:r>
               <a:rPr>
                 <a:solidFill>
-                  <a:schemeClr val="dk1"/>
-                </a:solidFill>
-              </a:rPr>
-              <a:t>Remote image</a:t>
+                  <a:schemeClr val="accent6"/>
+                </a:solidFill>
+              </a:rPr>
+              <a:t>Title and Content layout</a:t>
+            </a:r>
+            <a:endParaRPr>
+              <a:solidFill>
+                <a:schemeClr val="accent6"/>
+              </a:solidFill>
+            </a:endParaRPr>
+          </a:p>
+        </p:txBody>
+      </p:sp>
+      <p:sp>
+        <p:nvSpPr>
+          <p:cNvPr id="3" name="Content Placeholder 2"/>
+          <p:cNvSpPr>
+            <a:spLocks noGrp="1"/>
+          </p:cNvSpPr>
+          <p:nvPr>
+            <p:ph idx="1"/>
+          </p:nvPr>
+        </p:nvSpPr>
+        <p:spPr/>
+        <p:txBody>
+          <a:bodyPr wrap="square">
+            <a:normAutofit/>
+          </a:bodyPr>
+          <a:lstStyle/>
+          <a:p>
+            <a:pPr marL="0" indent="0">
+              <a:lnSpc>
+                <a:spcPct val="100000"/>
+              </a:lnSpc>
+              <a:spcBef>
+                <a:spcPts val="1200"/>
+              </a:spcBef>
+              <a:spcAft>
+                <a:spcPts val="600"/>
+              </a:spcAft>
+              <a:buNone/>
+              <a:defRPr>
+                <a:solidFill>
+                  <a:schemeClr val="dk1"/>
+                </a:solidFill>
+              </a:defRPr>
+            </a:pPr>
+            <a:r>
+              <a:rPr b="0" i="0">
+                <a:latin typeface="+mn-lt"/>
+                <a:ea typeface="+mn-ea"/>
+                <a:cs typeface="+mn-cs"/>
+                <a:solidFill>
+                  <a:schemeClr val="dk1"/>
+                </a:solidFill>
+              </a:rPr>
+              <a:t>This slide uses the default Title and Content layout.</a:t>
             </a:r>
             <a:endParaRPr>
               <a:solidFill>
                 <a:schemeClr val="dk1"/>
+              </a:solidFill>
+            </a:endParaRPr>
+          </a:p>
+        </p:txBody>
+      </p:sp>
+    </p:spTree>
+  </p:cSld>
+  <p:clrMapOvr>
+    <a:masterClrMapping/>
+  </p:clrMapOvr>
+</p:sld>
+</file>
+
+<file path=ppt/slides/slide11.xml><?xml version="1.0" encoding="utf-8"?>
+<p:sld xmlns:a="http://schemas.openxmlformats.org/drawingml/2006/main" xmlns:p="http://schemas.openxmlformats.org/presentationml/2006/main" xmlns:r="http://schemas.openxmlformats.org/officeDocument/2006/relationships">
+  <p:cSld>
+    <p:spTree>
+      <p:nvGrpSpPr>
+        <p:cNvPr id="1" name=""/>
+        <p:cNvGrpSpPr/>
+        <p:nvPr/>
+      </p:nvGrpSpPr>
+      <p:grpSpPr/>
+      <p:sp>
+        <p:nvSpPr>
+          <p:cNvPr id="2" name="Title 1"/>
+          <p:cNvSpPr>
+            <a:spLocks noGrp="1"/>
+          </p:cNvSpPr>
+          <p:nvPr>
+            <p:ph type="title"/>
+          </p:nvPr>
+        </p:nvSpPr>
+        <p:spPr/>
+        <p:txBody>
+          <a:bodyPr>
+            <a:normAutofit/>
+          </a:bodyPr>
+          <a:lstStyle/>
+          <a:p>
+            <a:pPr>
+              <a:defRPr>
+                <a:solidFill>
+                  <a:schemeClr val="accent6"/>
+                </a:solidFill>
+              </a:defRPr>
+            </a:pPr>
+            <a:r>
+              <a:rPr>
+                <a:solidFill>
+                  <a:schemeClr val="accent6"/>
+                </a:solidFill>
+              </a:rPr>
+              <a:t>Title Only layout</a:t>
+            </a:r>
+            <a:endParaRPr>
+              <a:solidFill>
+                <a:schemeClr val="accent6"/>
+              </a:solidFill>
+            </a:endParaRPr>
+          </a:p>
+        </p:txBody>
+      </p:sp>
+    </p:spTree>
+  </p:cSld>
+  <p:clrMapOvr>
+    <a:masterClrMapping/>
+  </p:clrMapOvr>
+</p:sld>
+</file>
+
+<file path=ppt/slides/slide12.xml><?xml version="1.0" encoding="utf-8"?>
+<p:sld xmlns:a="http://schemas.openxmlformats.org/drawingml/2006/main" xmlns:p="http://schemas.openxmlformats.org/presentationml/2006/main" xmlns:r="http://schemas.openxmlformats.org/officeDocument/2006/relationships">
+  <p:cSld>
+    <p:spTree>
+      <p:nvGrpSpPr>
+        <p:cNvPr id="1" name=""/>
+        <p:cNvGrpSpPr/>
+        <p:nvPr/>
+      </p:nvGrpSpPr>
+      <p:grpSpPr/>
+      <p:sp>
+        <p:nvSpPr>
+          <p:cNvPr id="2" name="Title 1"/>
+          <p:cNvSpPr>
+            <a:spLocks noGrp="1"/>
+          </p:cNvSpPr>
+          <p:nvPr>
+            <p:ph type="title"/>
+          </p:nvPr>
+        </p:nvSpPr>
+        <p:spPr/>
+        <p:txBody>
+          <a:bodyPr>
+            <a:normAutofit/>
+          </a:bodyPr>
+          <a:lstStyle/>
+          <a:p>
+            <a:pPr>
+              <a:defRPr>
+                <a:solidFill>
+                  <a:schemeClr val="accent6"/>
+                </a:solidFill>
+              </a:defRPr>
+            </a:pPr>
+            <a:r>
+              <a:rPr>
+                <a:solidFill>
+                  <a:schemeClr val="accent6"/>
+                </a:solidFill>
+              </a:rPr>
+              <a:t>Body text with hyperlinks</a:t>
+            </a:r>
+            <a:endParaRPr>
+              <a:solidFill>
+                <a:schemeClr val="accent6"/>
+              </a:solidFill>
+            </a:endParaRPr>
+          </a:p>
+        </p:txBody>
+      </p:sp>
+      <p:sp>
+        <p:nvSpPr>
+          <p:cNvPr id="3" name="Content Placeholder 2"/>
+          <p:cNvSpPr>
+            <a:spLocks noGrp="1"/>
+          </p:cNvSpPr>
+          <p:nvPr>
+            <p:ph idx="1"/>
+          </p:nvPr>
+        </p:nvSpPr>
+        <p:spPr/>
+        <p:txBody>
+          <a:bodyPr wrap="square">
+            <a:normAutofit/>
+          </a:bodyPr>
+          <a:lstStyle/>
+          <a:p>
+            <a:pPr marL="0" indent="0">
+              <a:lnSpc>
+                <a:spcPct val="100000"/>
+              </a:lnSpc>
+              <a:spcBef>
+                <a:spcPts val="1200"/>
+              </a:spcBef>
+              <a:spcAft>
+                <a:spcPts val="600"/>
+              </a:spcAft>
+              <a:buNone/>
+              <a:defRPr>
+                <a:solidFill>
+                  <a:schemeClr val="dk1"/>
+                </a:solidFill>
+              </a:defRPr>
+            </a:pPr>
+            <a:r>
+              <a:rPr b="0" i="0">
+                <a:latin typeface="Consolas"/>
+                <a:solidFill>
+                  <a:schemeClr val="dk1"/>
+                </a:solidFill>
+              </a:rPr>
+              <a:t>md-to-pptx</a:t>
+            </a:r>
+            <a:r>
+              <a:rPr b="0" i="0">
+                <a:latin typeface="+mn-lt"/>
+                <a:ea typeface="+mn-ea"/>
+                <a:cs typeface="+mn-cs"/>
+                <a:solidFill>
+                  <a:schemeClr val="dk1"/>
+                </a:solidFill>
+              </a:rPr>
+              <a:t> can include links in normal body text, such as the </a:t>
+            </a:r>
+            <a:r>
+              <a:rPr b="0" i="0">
+                <a:hlinkClick r:id="rId2"/>
+                <a:latin typeface="+mn-lt"/>
+                <a:ea typeface="+mn-ea"/>
+                <a:cs typeface="+mn-cs"/>
+                <a:solidFill>
+                  <a:schemeClr val="dk1"/>
+                </a:solidFill>
+              </a:rPr>
+              <a:t>project repository</a:t>
+            </a:r>
+            <a:r>
+              <a:rPr b="0" i="0">
+                <a:latin typeface="+mn-lt"/>
+                <a:ea typeface="+mn-ea"/>
+                <a:cs typeface="+mn-cs"/>
+                <a:solidFill>
+                  <a:schemeClr val="dk1"/>
+                </a:solidFill>
+              </a:rPr>
+              <a:t> and the </a:t>
+            </a:r>
+            <a:r>
+              <a:rPr b="0" i="0">
+                <a:hlinkClick r:id="rId3"/>
+                <a:latin typeface="+mn-lt"/>
+                <a:ea typeface="+mn-ea"/>
+                <a:cs typeface="+mn-cs"/>
+                <a:solidFill>
+                  <a:schemeClr val="dk1"/>
+                </a:solidFill>
+              </a:rPr>
+              <a:t>python-pptx documentation</a:t>
+            </a:r>
+            <a:r>
+              <a:rPr b="0" i="0">
+                <a:latin typeface="+mn-lt"/>
+                <a:ea typeface="+mn-ea"/>
+                <a:cs typeface="+mn-cs"/>
+                <a:solidFill>
+                  <a:schemeClr val="dk1"/>
+                </a:solidFill>
+              </a:rPr>
+              <a:t>.</a:t>
+            </a:r>
+            <a:endParaRPr>
+              <a:solidFill>
+                <a:schemeClr val="dk1"/>
+              </a:solidFill>
+            </a:endParaRPr>
+          </a:p>
+        </p:txBody>
+      </p:sp>
+    </p:spTree>
+  </p:cSld>
+  <p:clrMapOvr>
+    <a:masterClrMapping/>
+  </p:clrMapOvr>
+</p:sld>
+</file>
+
+<file path=ppt/slides/slide13.xml><?xml version="1.0" encoding="utf-8"?>
+<p:sld xmlns:a="http://schemas.openxmlformats.org/drawingml/2006/main" xmlns:p="http://schemas.openxmlformats.org/presentationml/2006/main" xmlns:r="http://schemas.openxmlformats.org/officeDocument/2006/relationships">
+  <p:cSld>
+    <p:spTree>
+      <p:nvGrpSpPr>
+        <p:cNvPr id="1" name=""/>
+        <p:cNvGrpSpPr/>
+        <p:nvPr/>
+      </p:nvGrpSpPr>
+      <p:grpSpPr/>
+      <p:sp>
+        <p:nvSpPr>
+          <p:cNvPr id="2" name="Title 1"/>
+          <p:cNvSpPr>
+            <a:spLocks noGrp="1"/>
+          </p:cNvSpPr>
+          <p:nvPr>
+            <p:ph type="title"/>
+          </p:nvPr>
+        </p:nvSpPr>
+        <p:spPr/>
+        <p:txBody>
+          <a:bodyPr>
+            <a:normAutofit/>
+          </a:bodyPr>
+          <a:lstStyle/>
+          <a:p>
+            <a:pPr>
+              <a:defRPr>
+                <a:solidFill>
+                  <a:schemeClr val="accent6"/>
+                </a:solidFill>
+              </a:defRPr>
+            </a:pPr>
+            <a:r>
+              <a:rPr>
+                <a:solidFill>
+                  <a:schemeClr val="accent6"/>
+                </a:solidFill>
+              </a:rPr>
+              <a:t>H2 through H4 headings</a:t>
+            </a:r>
+            <a:endParaRPr>
+              <a:solidFill>
+                <a:schemeClr val="accent6"/>
+              </a:solidFill>
+            </a:endParaRPr>
+          </a:p>
+        </p:txBody>
+      </p:sp>
+      <p:sp>
+        <p:nvSpPr>
+          <p:cNvPr id="3" name="Content Placeholder 2"/>
+          <p:cNvSpPr>
+            <a:spLocks noGrp="1"/>
+          </p:cNvSpPr>
+          <p:nvPr>
+            <p:ph idx="1"/>
+          </p:nvPr>
+        </p:nvSpPr>
+        <p:spPr/>
+        <p:txBody>
+          <a:bodyPr wrap="square">
+            <a:normAutofit/>
+          </a:bodyPr>
+          <a:lstStyle/>
+          <a:p>
+            <a:pPr marL="0" indent="0">
+              <a:buNone/>
+              <a:defRPr>
+                <a:solidFill>
+                  <a:schemeClr val="dk1"/>
+                </a:solidFill>
+              </a:defRPr>
+            </a:pPr>
+            <a:r>
+              <a:rPr sz="3700" b="1">
+                <a:latin typeface="+mj-lt"/>
+                <a:ea typeface="+mj-ea"/>
+                <a:cs typeface="+mj-cs"/>
+                <a:solidFill>
+                  <a:schemeClr val="dk1"/>
+                </a:solidFill>
+              </a:rPr>
+              <a:t>H2 heading</a:t>
+            </a:r>
+            <a:endParaRPr>
+              <a:solidFill>
+                <a:schemeClr val="dk1"/>
+              </a:solidFill>
+            </a:endParaRPr>
+          </a:p>
+          <a:p>
+            <a:pPr marL="0" indent="0">
+              <a:lnSpc>
+                <a:spcPct val="100000"/>
+              </a:lnSpc>
+              <a:spcBef>
+                <a:spcPts val="1200"/>
+              </a:spcBef>
+              <a:spcAft>
+                <a:spcPts val="600"/>
+              </a:spcAft>
+              <a:buNone/>
+              <a:defRPr>
+                <a:solidFill>
+                  <a:schemeClr val="dk1"/>
+                </a:solidFill>
+              </a:defRPr>
+            </a:pPr>
+            <a:r>
+              <a:rPr b="0" i="0">
+                <a:latin typeface="+mn-lt"/>
+                <a:ea typeface="+mn-ea"/>
+                <a:cs typeface="+mn-cs"/>
+                <a:solidFill>
+                  <a:schemeClr val="dk1"/>
+                </a:solidFill>
+              </a:rPr>
+              <a:t>H2 stays inside the current slide body.</a:t>
+            </a:r>
+            <a:endParaRPr>
+              <a:solidFill>
+                <a:schemeClr val="dk1"/>
+              </a:solidFill>
+            </a:endParaRPr>
+          </a:p>
+          <a:p>
+            <a:pPr marL="0" indent="0">
+              <a:buNone/>
+              <a:defRPr>
+                <a:solidFill>
+                  <a:schemeClr val="dk1"/>
+                </a:solidFill>
+              </a:defRPr>
+            </a:pPr>
+            <a:r>
+              <a:rPr sz="3400" b="1">
+                <a:latin typeface="+mj-lt"/>
+                <a:ea typeface="+mj-ea"/>
+                <a:cs typeface="+mj-cs"/>
+                <a:solidFill>
+                  <a:schemeClr val="dk1"/>
+                </a:solidFill>
+              </a:rPr>
+              <a:t>H3 heading</a:t>
+            </a:r>
+            <a:endParaRPr>
+              <a:solidFill>
+                <a:schemeClr val="dk1"/>
+              </a:solidFill>
+            </a:endParaRPr>
+          </a:p>
+          <a:p>
+            <a:pPr marL="0" indent="0">
+              <a:lnSpc>
+                <a:spcPct val="100000"/>
+              </a:lnSpc>
+              <a:spcBef>
+                <a:spcPts val="1200"/>
+              </a:spcBef>
+              <a:spcAft>
+                <a:spcPts val="600"/>
+              </a:spcAft>
+              <a:buNone/>
+              <a:defRPr>
+                <a:solidFill>
+                  <a:schemeClr val="dk1"/>
+                </a:solidFill>
+              </a:defRPr>
+            </a:pPr>
+            <a:r>
+              <a:rPr b="0" i="0">
+                <a:latin typeface="+mn-lt"/>
+                <a:ea typeface="+mn-ea"/>
+                <a:cs typeface="+mn-cs"/>
+                <a:solidFill>
+                  <a:schemeClr val="dk1"/>
+                </a:solidFill>
+              </a:rPr>
+              <a:t>H3 also stays inside the same slide body.</a:t>
+            </a:r>
+            <a:endParaRPr>
+              <a:solidFill>
+                <a:schemeClr val="dk1"/>
+              </a:solidFill>
+            </a:endParaRPr>
+          </a:p>
+          <a:p>
+            <a:pPr marL="0" indent="0">
+              <a:buNone/>
+              <a:defRPr>
+                <a:solidFill>
+                  <a:schemeClr val="dk1"/>
+                </a:solidFill>
+              </a:defRPr>
+            </a:pPr>
+            <a:r>
+              <a:rPr sz="3100" b="1">
+                <a:latin typeface="+mj-lt"/>
+                <a:ea typeface="+mj-ea"/>
+                <a:cs typeface="+mj-cs"/>
+                <a:solidFill>
+                  <a:schemeClr val="dk1"/>
+                </a:solidFill>
+              </a:rPr>
+              <a:t>H4 heading</a:t>
+            </a:r>
+            <a:endParaRPr>
+              <a:solidFill>
+                <a:schemeClr val="dk1"/>
+              </a:solidFill>
+            </a:endParaRPr>
+          </a:p>
+          <a:p>
+            <a:pPr marL="0" indent="0">
+              <a:lnSpc>
+                <a:spcPct val="100000"/>
+              </a:lnSpc>
+              <a:spcBef>
+                <a:spcPts val="1200"/>
+              </a:spcBef>
+              <a:spcAft>
+                <a:spcPts val="600"/>
+              </a:spcAft>
+              <a:buNone/>
+              <a:defRPr>
+                <a:solidFill>
+                  <a:schemeClr val="dk1"/>
+                </a:solidFill>
+              </a:defRPr>
+            </a:pPr>
+            <a:r>
+              <a:rPr b="0" i="0">
+                <a:latin typeface="+mn-lt"/>
+                <a:ea typeface="+mn-ea"/>
+                <a:cs typeface="+mn-cs"/>
+                <a:solidFill>
+                  <a:schemeClr val="dk1"/>
+                </a:solidFill>
+              </a:rPr>
+              <a:t>H4 is rendered smaller while still using heading styling.</a:t>
+            </a:r>
+            <a:endParaRPr>
+              <a:solidFill>
+                <a:schemeClr val="dk1"/>
+              </a:solidFill>
+            </a:endParaRPr>
+          </a:p>
+        </p:txBody>
+      </p:sp>
+    </p:spTree>
+  </p:cSld>
+  <p:clrMapOvr>
+    <a:masterClrMapping/>
+  </p:clrMapOvr>
+</p:sld>
+</file>
+
+<file path=ppt/slides/slide14.xml><?xml version="1.0" encoding="utf-8"?>
+<p:sld xmlns:a="http://schemas.openxmlformats.org/drawingml/2006/main" xmlns:p="http://schemas.openxmlformats.org/presentationml/2006/main" xmlns:r="http://schemas.openxmlformats.org/officeDocument/2006/relationships">
+  <p:cSld>
+    <p:spTree>
+      <p:nvGrpSpPr>
+        <p:cNvPr id="1" name=""/>
+        <p:cNvGrpSpPr/>
+        <p:nvPr/>
+      </p:nvGrpSpPr>
+      <p:grpSpPr/>
+      <p:sp>
+        <p:nvSpPr>
+          <p:cNvPr id="2" name="Title 1"/>
+          <p:cNvSpPr>
+            <a:spLocks noGrp="1"/>
+          </p:cNvSpPr>
+          <p:nvPr>
+            <p:ph type="title"/>
+          </p:nvPr>
+        </p:nvSpPr>
+        <p:spPr/>
+        <p:txBody>
+          <a:bodyPr>
+            <a:normAutofit/>
+          </a:bodyPr>
+          <a:lstStyle/>
+          <a:p>
+            <a:pPr>
+              <a:defRPr>
+                <a:solidFill>
+                  <a:schemeClr val="accent6"/>
+                </a:solidFill>
+              </a:defRPr>
+            </a:pPr>
+            <a:r>
+              <a:rPr>
+                <a:solidFill>
+                  <a:schemeClr val="accent6"/>
+                </a:solidFill>
+              </a:rPr>
+              <a:t>Bulleted list</a:t>
+            </a:r>
+            <a:endParaRPr>
+              <a:solidFill>
+                <a:schemeClr val="accent6"/>
+              </a:solidFill>
+            </a:endParaRPr>
+          </a:p>
+        </p:txBody>
+      </p:sp>
+      <p:sp>
+        <p:nvSpPr>
+          <p:cNvPr id="3" name="Content Placeholder 2"/>
+          <p:cNvSpPr>
+            <a:spLocks noGrp="1"/>
+          </p:cNvSpPr>
+          <p:nvPr>
+            <p:ph idx="1"/>
+          </p:nvPr>
+        </p:nvSpPr>
+        <p:spPr/>
+        <p:txBody>
+          <a:bodyPr wrap="square">
+            <a:normAutofit/>
+          </a:bodyPr>
+          <a:lstStyle/>
+          <a:p>
+            <a:pPr>
+              <a:defRPr>
+                <a:solidFill>
+                  <a:schemeClr val="dk1"/>
+                </a:solidFill>
+              </a:defRPr>
+            </a:pPr>
+            <a:r>
+              <a:rPr b="0" i="0">
+                <a:latin typeface="+mn-lt"/>
+                <a:ea typeface="+mn-ea"/>
+                <a:cs typeface="+mn-cs"/>
+                <a:solidFill>
+                  <a:schemeClr val="dk1"/>
+                </a:solidFill>
+              </a:rPr>
+              <a:t>Write a readable Markdown deck</a:t>
+            </a:r>
+            <a:endParaRPr>
+              <a:solidFill>
+                <a:schemeClr val="dk1"/>
+              </a:solidFill>
+            </a:endParaRPr>
+          </a:p>
+          <a:p>
+            <a:pPr>
+              <a:defRPr>
+                <a:solidFill>
+                  <a:schemeClr val="dk1"/>
+                </a:solidFill>
+              </a:defRPr>
+            </a:pPr>
+            <a:r>
+              <a:rPr b="0" i="0">
+                <a:latin typeface="+mn-lt"/>
+                <a:ea typeface="+mn-ea"/>
+                <a:cs typeface="+mn-cs"/>
+                <a:solidFill>
+                  <a:schemeClr val="dk1"/>
+                </a:solidFill>
+              </a:rPr>
+              <a:t>Choose a template if needed</a:t>
+            </a:r>
+            <a:endParaRPr>
+              <a:solidFill>
+                <a:schemeClr val="dk1"/>
+              </a:solidFill>
+            </a:endParaRPr>
+          </a:p>
+          <a:p>
+            <a:pPr>
+              <a:defRPr>
+                <a:solidFill>
+                  <a:schemeClr val="dk1"/>
+                </a:solidFill>
+              </a:defRPr>
+            </a:pPr>
+            <a:r>
+              <a:rPr b="0" i="0">
+                <a:latin typeface="+mn-lt"/>
+                <a:ea typeface="+mn-ea"/>
+                <a:cs typeface="+mn-cs"/>
+                <a:solidFill>
+                  <a:schemeClr val="dk1"/>
+                </a:solidFill>
+              </a:rPr>
+              <a:t>Render an editable PowerPoint file</a:t>
+            </a:r>
+            <a:endParaRPr>
+              <a:solidFill>
+                <a:schemeClr val="dk1"/>
+              </a:solidFill>
+            </a:endParaRPr>
+          </a:p>
+        </p:txBody>
+      </p:sp>
+    </p:spTree>
+  </p:cSld>
+  <p:clrMapOvr>
+    <a:masterClrMapping/>
+  </p:clrMapOvr>
+</p:sld>
+</file>
+
+<file path=ppt/slides/slide15.xml><?xml version="1.0" encoding="utf-8"?>
+<p:sld xmlns:a="http://schemas.openxmlformats.org/drawingml/2006/main" xmlns:p="http://schemas.openxmlformats.org/presentationml/2006/main" xmlns:r="http://schemas.openxmlformats.org/officeDocument/2006/relationships">
+  <p:cSld>
+    <p:spTree>
+      <p:nvGrpSpPr>
+        <p:cNvPr id="1" name=""/>
+        <p:cNvGrpSpPr/>
+        <p:nvPr/>
+      </p:nvGrpSpPr>
+      <p:grpSpPr/>
+      <p:sp>
+        <p:nvSpPr>
+          <p:cNvPr id="2" name="Title 1"/>
+          <p:cNvSpPr>
+            <a:spLocks noGrp="1"/>
+          </p:cNvSpPr>
+          <p:nvPr>
+            <p:ph type="title"/>
+          </p:nvPr>
+        </p:nvSpPr>
+        <p:spPr/>
+        <p:txBody>
+          <a:bodyPr>
+            <a:normAutofit/>
+          </a:bodyPr>
+          <a:lstStyle/>
+          <a:p>
+            <a:pPr>
+              <a:defRPr>
+                <a:solidFill>
+                  <a:schemeClr val="accent6"/>
+                </a:solidFill>
+              </a:defRPr>
+            </a:pPr>
+            <a:r>
+              <a:rPr>
+                <a:solidFill>
+                  <a:schemeClr val="accent6"/>
+                </a:solidFill>
+              </a:rPr>
+              <a:t>Numbered list</a:t>
+            </a:r>
+            <a:endParaRPr>
+              <a:solidFill>
+                <a:schemeClr val="accent6"/>
+              </a:solidFill>
+            </a:endParaRPr>
+          </a:p>
+        </p:txBody>
+      </p:sp>
+      <p:sp>
+        <p:nvSpPr>
+          <p:cNvPr id="3" name="Content Placeholder 2"/>
+          <p:cNvSpPr>
+            <a:spLocks noGrp="1"/>
+          </p:cNvSpPr>
+          <p:nvPr>
+            <p:ph idx="1"/>
+          </p:nvPr>
+        </p:nvSpPr>
+        <p:spPr/>
+        <p:txBody>
+          <a:bodyPr wrap="square">
+            <a:normAutofit/>
+          </a:bodyPr>
+          <a:lstStyle/>
+          <a:p>
+            <a:pPr>
+              <a:buAutoNum type="arabicPeriod" startAt="1"/>
+              <a:defRPr>
+                <a:solidFill>
+                  <a:schemeClr val="dk1"/>
+                </a:solidFill>
+              </a:defRPr>
+            </a:pPr>
+            <a:r>
+              <a:rPr b="0" i="0">
+                <a:latin typeface="+mn-lt"/>
+                <a:ea typeface="+mn-ea"/>
+                <a:cs typeface="+mn-cs"/>
+                <a:solidFill>
+                  <a:schemeClr val="dk1"/>
+                </a:solidFill>
+              </a:rPr>
+              <a:t>Write the markdown source</a:t>
+            </a:r>
+            <a:endParaRPr>
+              <a:solidFill>
+                <a:schemeClr val="dk1"/>
+              </a:solidFill>
+            </a:endParaRPr>
+          </a:p>
+          <a:p>
+            <a:pPr>
+              <a:buAutoNum type="arabicPeriod" startAt="2"/>
+              <a:defRPr>
+                <a:solidFill>
+                  <a:schemeClr val="dk1"/>
+                </a:solidFill>
+              </a:defRPr>
+            </a:pPr>
+            <a:r>
+              <a:rPr b="0" i="0">
+                <a:latin typeface="+mn-lt"/>
+                <a:ea typeface="+mn-ea"/>
+                <a:cs typeface="+mn-cs"/>
+                <a:solidFill>
+                  <a:schemeClr val="dk1"/>
+                </a:solidFill>
+              </a:rPr>
+              <a:t>Run the CLI</a:t>
+            </a:r>
+            <a:endParaRPr>
+              <a:solidFill>
+                <a:schemeClr val="dk1"/>
+              </a:solidFill>
+            </a:endParaRPr>
+          </a:p>
+          <a:p>
+            <a:pPr>
+              <a:buAutoNum type="arabicPeriod" startAt="3"/>
+              <a:defRPr>
+                <a:solidFill>
+                  <a:schemeClr val="dk1"/>
+                </a:solidFill>
+              </a:defRPr>
+            </a:pPr>
+            <a:r>
+              <a:rPr b="0" i="0">
+                <a:latin typeface="+mn-lt"/>
+                <a:ea typeface="+mn-ea"/>
+                <a:cs typeface="+mn-cs"/>
+                <a:solidFill>
+                  <a:schemeClr val="dk1"/>
+                </a:solidFill>
+              </a:rPr>
+              <a:t>Open the generated </a:t>
+            </a:r>
+            <a:r>
+              <a:rPr b="0" i="0">
+                <a:latin typeface="Consolas"/>
+                <a:solidFill>
+                  <a:schemeClr val="dk1"/>
+                </a:solidFill>
+              </a:rPr>
+              <a:t>.pptx</a:t>
+            </a:r>
+            <a:endParaRPr>
+              <a:solidFill>
+                <a:schemeClr val="dk1"/>
+              </a:solidFill>
+            </a:endParaRPr>
+          </a:p>
+        </p:txBody>
+      </p:sp>
+    </p:spTree>
+  </p:cSld>
+  <p:clrMapOvr>
+    <a:masterClrMapping/>
+  </p:clrMapOvr>
+</p:sld>
+</file>
+
+<file path=ppt/slides/slide16.xml><?xml version="1.0" encoding="utf-8"?>
+<p:sld xmlns:a="http://schemas.openxmlformats.org/drawingml/2006/main" xmlns:p="http://schemas.openxmlformats.org/presentationml/2006/main" xmlns:r="http://schemas.openxmlformats.org/officeDocument/2006/relationships">
+  <p:cSld>
+    <p:spTree>
+      <p:nvGrpSpPr>
+        <p:cNvPr id="1" name=""/>
+        <p:cNvGrpSpPr/>
+        <p:nvPr/>
+      </p:nvGrpSpPr>
+      <p:grpSpPr/>
+      <p:sp>
+        <p:nvSpPr>
+          <p:cNvPr id="2" name="Title 1"/>
+          <p:cNvSpPr>
+            <a:spLocks noGrp="1"/>
+          </p:cNvSpPr>
+          <p:nvPr>
+            <p:ph type="title"/>
+          </p:nvPr>
+        </p:nvSpPr>
+        <p:spPr/>
+        <p:txBody>
+          <a:bodyPr>
+            <a:normAutofit/>
+          </a:bodyPr>
+          <a:lstStyle/>
+          <a:p>
+            <a:pPr>
+              <a:defRPr>
+                <a:solidFill>
+                  <a:schemeClr val="accent6"/>
+                </a:solidFill>
+              </a:defRPr>
+            </a:pPr>
+            <a:r>
+              <a:rPr>
+                <a:solidFill>
+                  <a:schemeClr val="accent6"/>
+                </a:solidFill>
+              </a:rPr>
+              <a:t>Blockquote</a:t>
+            </a:r>
+            <a:endParaRPr>
+              <a:solidFill>
+                <a:schemeClr val="accent6"/>
+              </a:solidFill>
+            </a:endParaRPr>
+          </a:p>
+        </p:txBody>
+      </p:sp>
+      <p:sp>
+        <p:nvSpPr>
+          <p:cNvPr id="3" name="Content Placeholder 2"/>
+          <p:cNvSpPr>
+            <a:spLocks noGrp="1"/>
+          </p:cNvSpPr>
+          <p:nvPr>
+            <p:ph idx="1"/>
+          </p:nvPr>
+        </p:nvSpPr>
+        <p:spPr/>
+        <p:txBody>
+          <a:bodyPr wrap="square">
+            <a:normAutofit/>
+          </a:bodyPr>
+          <a:lstStyle/>
+          <a:p>
+            <a:pPr marL="0" indent="0">
+              <a:spcBef>
+                <a:spcPts val="600"/>
+              </a:spcBef>
+              <a:spcAft>
+                <a:spcPts val="600"/>
+              </a:spcAft>
+              <a:buNone/>
+            </a:pPr>
+            <a:r>
+              <a:rPr i="1">
+                <a:latin typeface="+mn-lt"/>
+                <a:ea typeface="+mn-ea"/>
+                <a:cs typeface="+mn-cs"/>
+                <a:solidFill>
+                  <a:schemeClr val="accent1"/>
+                </a:solidFill>
+              </a:rPr>
+              <a:t>md-to-pptx keeps the source format simple enough to read directly while still producing a real presentation.</a:t>
+            </a:r>
+          </a:p>
+        </p:txBody>
+      </p:sp>
+    </p:spTree>
+  </p:cSld>
+  <p:clrMapOvr>
+    <a:masterClrMapping/>
+  </p:clrMapOvr>
+</p:sld>
+</file>
+
+<file path=ppt/slides/slide17.xml><?xml version="1.0" encoding="utf-8"?>
+<p:sld xmlns:a="http://schemas.openxmlformats.org/drawingml/2006/main" xmlns:p="http://schemas.openxmlformats.org/presentationml/2006/main" xmlns:r="http://schemas.openxmlformats.org/officeDocument/2006/relationships">
+  <p:cSld>
+    <p:spTree>
+      <p:nvGrpSpPr>
+        <p:cNvPr id="1" name=""/>
+        <p:cNvGrpSpPr/>
+        <p:nvPr/>
+      </p:nvGrpSpPr>
+      <p:grpSpPr/>
+      <p:sp>
+        <p:nvSpPr>
+          <p:cNvPr id="2" name="Title 1"/>
+          <p:cNvSpPr>
+            <a:spLocks noGrp="1"/>
+          </p:cNvSpPr>
+          <p:nvPr>
+            <p:ph type="title"/>
+          </p:nvPr>
+        </p:nvSpPr>
+        <p:spPr/>
+        <p:txBody>
+          <a:bodyPr>
+            <a:normAutofit/>
+          </a:bodyPr>
+          <a:lstStyle/>
+          <a:p>
+            <a:pPr>
+              <a:defRPr>
+                <a:solidFill>
+                  <a:schemeClr val="accent6"/>
+                </a:solidFill>
+              </a:defRPr>
+            </a:pPr>
+            <a:r>
+              <a:rPr>
+                <a:solidFill>
+                  <a:schemeClr val="accent6"/>
+                </a:solidFill>
+              </a:rPr>
+              <a:t>Code block</a:t>
+            </a:r>
+            <a:endParaRPr>
+              <a:solidFill>
+                <a:schemeClr val="accent6"/>
+              </a:solidFill>
+            </a:endParaRPr>
+          </a:p>
+        </p:txBody>
+      </p:sp>
+      <p:sp>
+        <p:nvSpPr>
+          <p:cNvPr id="3" name="Content Placeholder 2"/>
+          <p:cNvSpPr>
+            <a:spLocks noGrp="1"/>
+          </p:cNvSpPr>
+          <p:nvPr>
+            <p:ph idx="1"/>
+          </p:nvPr>
+        </p:nvSpPr>
+        <p:spPr/>
+        <p:txBody>
+          <a:bodyPr wrap="square">
+            <a:normAutofit/>
+          </a:bodyPr>
+          <a:lstStyle/>
+          <a:p>
+            <a:pPr marL="0" indent="0">
+              <a:buNone/>
+              <a:defRPr>
+                <a:solidFill>
+                  <a:schemeClr val="dk1"/>
+                </a:solidFill>
+              </a:defRPr>
+            </a:pPr>
+            <a:r>
+              <a:rPr b="0" i="0">
+                <a:latin typeface="Consolas"/>
+                <a:solidFill>
+                  <a:schemeClr val="dk1"/>
+                </a:solidFill>
+              </a:rPr>
+              <a:t>md-to-pptx sample/showcase.md sample/showcase.pptx --force</a:t>
+            </a:r>
+            <a:endParaRPr>
+              <a:solidFill>
+                <a:schemeClr val="dk1"/>
+              </a:solidFill>
+            </a:endParaRPr>
+          </a:p>
+        </p:txBody>
+      </p:sp>
+    </p:spTree>
+  </p:cSld>
+  <p:clrMapOvr>
+    <a:masterClrMapping/>
+  </p:clrMapOvr>
+</p:sld>
+</file>
+
+<file path=ppt/slides/slide18.xml><?xml version="1.0" encoding="utf-8"?>
+<p:sld xmlns:a="http://schemas.openxmlformats.org/drawingml/2006/main" xmlns:p="http://schemas.openxmlformats.org/presentationml/2006/main" xmlns:r="http://schemas.openxmlformats.org/officeDocument/2006/relationships">
+  <p:cSld>
+    <p:spTree>
+      <p:nvGrpSpPr>
+        <p:cNvPr id="1" name=""/>
+        <p:cNvGrpSpPr/>
+        <p:nvPr/>
+      </p:nvGrpSpPr>
+      <p:grpSpPr/>
+      <p:sp>
+        <p:nvSpPr>
+          <p:cNvPr id="2" name="Title 1"/>
+          <p:cNvSpPr>
+            <a:spLocks noGrp="1"/>
+          </p:cNvSpPr>
+          <p:nvPr>
+            <p:ph type="title"/>
+          </p:nvPr>
+        </p:nvSpPr>
+        <p:spPr/>
+        <p:txBody>
+          <a:bodyPr>
+            <a:normAutofit/>
+          </a:bodyPr>
+          <a:lstStyle/>
+          <a:p>
+            <a:pPr>
+              <a:defRPr>
+                <a:solidFill>
+                  <a:schemeClr val="accent6"/>
+                </a:solidFill>
+              </a:defRPr>
+            </a:pPr>
+            <a:r>
+              <a:rPr>
+                <a:solidFill>
+                  <a:schemeClr val="accent6"/>
+                </a:solidFill>
+              </a:rPr>
+              <a:t>Local image</a:t>
+            </a:r>
+            <a:endParaRPr>
+              <a:solidFill>
+                <a:schemeClr val="accent6"/>
+              </a:solidFill>
+            </a:endParaRPr>
+          </a:p>
+        </p:txBody>
+      </p:sp>
+      <p:sp>
+        <p:nvSpPr>
+          <p:cNvPr id="3" name="Content Placeholder 2"/>
+          <p:cNvSpPr>
+            <a:spLocks noGrp="1"/>
+          </p:cNvSpPr>
+          <p:nvPr>
+            <p:ph idx="1"/>
+          </p:nvPr>
+        </p:nvSpPr>
+        <p:spPr/>
+        <p:txBody>
+          <a:bodyPr/>
+          <a:lstStyle/>
+          <a:p/>
+        </p:txBody>
+      </p:sp>
+      <p:pic>
+        <p:nvPicPr>
+          <p:cNvPr id="4" name="MarkdownSlidesImage" descr="showcase-local.png"/>
+          <p:cNvPicPr>
+            <a:picLocks noChangeAspect="1"/>
+          </p:cNvPicPr>
+          <p:nvPr/>
+        </p:nvPicPr>
+        <p:blipFill>
+          <a:blip r:embed="rId2"/>
+          <a:stretch>
+            <a:fillRect/>
+          </a:stretch>
+        </p:blipFill>
+        <p:spPr>
+          <a:xfrm>
+            <a:off x="2228144" y="1825625"/>
+            <a:ext cx="7735712" cy="4351338"/>
+          </a:xfrm>
+          <a:prstGeom prst="rect">
+            <a:avLst/>
+          </a:prstGeom>
+        </p:spPr>
+      </p:pic>
+    </p:spTree>
+  </p:cSld>
+  <p:clrMapOvr>
+    <a:masterClrMapping/>
+  </p:clrMapOvr>
+</p:sld>
+</file>
+
+<file path=ppt/slides/slide19.xml><?xml version="1.0" encoding="utf-8"?>
+<p:sld xmlns:a="http://schemas.openxmlformats.org/drawingml/2006/main" xmlns:p="http://schemas.openxmlformats.org/presentationml/2006/main" xmlns:r="http://schemas.openxmlformats.org/officeDocument/2006/relationships">
+  <p:cSld>
+    <p:spTree>
+      <p:nvGrpSpPr>
+        <p:cNvPr id="1" name=""/>
+        <p:cNvGrpSpPr/>
+        <p:nvPr/>
+      </p:nvGrpSpPr>
+      <p:grpSpPr/>
+      <p:sp>
+        <p:nvSpPr>
+          <p:cNvPr id="2" name="Title 1"/>
+          <p:cNvSpPr>
+            <a:spLocks noGrp="1"/>
+          </p:cNvSpPr>
+          <p:nvPr>
+            <p:ph type="title"/>
+          </p:nvPr>
+        </p:nvSpPr>
+        <p:spPr/>
+        <p:txBody>
+          <a:bodyPr>
+            <a:normAutofit/>
+          </a:bodyPr>
+          <a:lstStyle/>
+          <a:p>
+            <a:pPr>
+              <a:defRPr>
+                <a:solidFill>
+                  <a:schemeClr val="accent6"/>
+                </a:solidFill>
+              </a:defRPr>
+            </a:pPr>
+            <a:r>
+              <a:rPr>
+                <a:solidFill>
+                  <a:schemeClr val="accent6"/>
+                </a:solidFill>
+              </a:rPr>
+              <a:t>Remote image</a:t>
+            </a:r>
+            <a:endParaRPr>
+              <a:solidFill>
+                <a:schemeClr val="accent6"/>
               </a:solidFill>
             </a:endParaRPr>
           </a:p>
@@ -5064,27 +5210,189 @@
 </p:sld>
 </file>
 
-<file path=ppt/slides/slide11.xml><?xml version="1.0" encoding="utf-8"?>
+<file path=ppt/slides/slide2.xml><?xml version="1.0" encoding="utf-8"?>
+<p:sld xmlns:a="http://schemas.openxmlformats.org/drawingml/2006/main" xmlns:p="http://schemas.openxmlformats.org/presentationml/2006/main" xmlns:r="http://schemas.openxmlformats.org/officeDocument/2006/relationships">
+  <p:cSld>
+    <p:spTree>
+      <p:nvGrpSpPr>
+        <p:cNvPr id="1" name=""/>
+        <p:cNvGrpSpPr/>
+        <p:nvPr/>
+      </p:nvGrpSpPr>
+      <p:grpSpPr/>
+      <p:sp>
+        <p:nvSpPr>
+          <p:cNvPr id="2" name="Title 1"/>
+          <p:cNvSpPr>
+            <a:spLocks noGrp="1"/>
+          </p:cNvSpPr>
+          <p:nvPr>
+            <p:ph type="title"/>
+          </p:nvPr>
+        </p:nvSpPr>
+        <p:spPr/>
+        <p:txBody>
+          <a:bodyPr>
+            <a:normAutofit/>
+          </a:bodyPr>
+          <a:lstStyle/>
+          <a:p>
+            <a:pPr>
+              <a:defRPr>
+                <a:solidFill>
+                  <a:schemeClr val="accent6"/>
+                </a:solidFill>
+              </a:defRPr>
+            </a:pPr>
+            <a:r>
+              <a:rPr>
+                <a:solidFill>
+                  <a:schemeClr val="accent6"/>
+                </a:solidFill>
+              </a:rPr>
+              <a:t>What md-to-pptx is</a:t>
+            </a:r>
+            <a:endParaRPr>
+              <a:solidFill>
+                <a:schemeClr val="accent6"/>
+              </a:solidFill>
+            </a:endParaRPr>
+          </a:p>
+        </p:txBody>
+      </p:sp>
+      <p:sp>
+        <p:nvSpPr>
+          <p:cNvPr id="3" name="Content Placeholder 2"/>
+          <p:cNvSpPr>
+            <a:spLocks noGrp="1"/>
+          </p:cNvSpPr>
+          <p:nvPr>
+            <p:ph idx="1"/>
+          </p:nvPr>
+        </p:nvSpPr>
+        <p:spPr/>
+        <p:txBody>
+          <a:bodyPr wrap="square">
+            <a:normAutofit/>
+          </a:bodyPr>
+          <a:lstStyle/>
+          <a:p>
+            <a:pPr marL="0" indent="0">
+              <a:lnSpc>
+                <a:spcPct val="100000"/>
+              </a:lnSpc>
+              <a:spcBef>
+                <a:spcPts val="1200"/>
+              </a:spcBef>
+              <a:spcAft>
+                <a:spcPts val="600"/>
+              </a:spcAft>
+              <a:buNone/>
+              <a:defRPr>
+                <a:solidFill>
+                  <a:schemeClr val="dk1"/>
+                </a:solidFill>
+              </a:defRPr>
+            </a:pPr>
+            <a:r>
+              <a:rPr b="0" i="0">
+                <a:latin typeface="Consolas"/>
+                <a:solidFill>
+                  <a:schemeClr val="dk1"/>
+                </a:solidFill>
+              </a:rPr>
+              <a:t>md-to-pptx</a:t>
+            </a:r>
+            <a:r>
+              <a:rPr b="0" i="0">
+                <a:latin typeface="+mn-lt"/>
+                <a:ea typeface="+mn-ea"/>
+                <a:cs typeface="+mn-cs"/>
+                <a:solidFill>
+                  <a:schemeClr val="dk1"/>
+                </a:solidFill>
+              </a:rPr>
+              <a:t> converts constrained Markdown slide decks into editable PowerPoint </a:t>
+            </a:r>
+            <a:r>
+              <a:rPr b="0" i="0">
+                <a:latin typeface="Consolas"/>
+                <a:solidFill>
+                  <a:schemeClr val="dk1"/>
+                </a:solidFill>
+              </a:rPr>
+              <a:t>.pptx</a:t>
+            </a:r>
+            <a:r>
+              <a:rPr b="0" i="0">
+                <a:latin typeface="+mn-lt"/>
+                <a:ea typeface="+mn-ea"/>
+                <a:cs typeface="+mn-cs"/>
+                <a:solidFill>
+                  <a:schemeClr val="dk1"/>
+                </a:solidFill>
+              </a:rPr>
+              <a:t> presentations.</a:t>
+            </a:r>
+            <a:endParaRPr>
+              <a:solidFill>
+                <a:schemeClr val="dk1"/>
+              </a:solidFill>
+            </a:endParaRPr>
+          </a:p>
+          <a:p>
+            <a:pPr marL="0" indent="0">
+              <a:lnSpc>
+                <a:spcPct val="100000"/>
+              </a:lnSpc>
+              <a:spcBef>
+                <a:spcPts val="1200"/>
+              </a:spcBef>
+              <a:spcAft>
+                <a:spcPts val="600"/>
+              </a:spcAft>
+              <a:buNone/>
+              <a:defRPr>
+                <a:solidFill>
+                  <a:schemeClr val="dk1"/>
+                </a:solidFill>
+              </a:defRPr>
+            </a:pPr>
+            <a:r>
+              <a:rPr b="0" i="0">
+                <a:latin typeface="+mn-lt"/>
+                <a:ea typeface="+mn-ea"/>
+                <a:cs typeface="+mn-cs"/>
+                <a:solidFill>
+                  <a:schemeClr val="dk1"/>
+                </a:solidFill>
+              </a:rPr>
+              <a:t>It uses real PowerPoint layouts and placeholders, so the output stays easy to edit in PowerPoint instead of becoming a pile of free-positioned text boxes.</a:t>
+            </a:r>
+            <a:endParaRPr>
+              <a:solidFill>
+                <a:schemeClr val="dk1"/>
+              </a:solidFill>
+            </a:endParaRPr>
+          </a:p>
+        </p:txBody>
+      </p:sp>
+    </p:spTree>
+  </p:cSld>
+  <p:clrMapOvr>
+    <a:masterClrMapping/>
+  </p:clrMapOvr>
+</p:sld>
+</file>
+
+<file path=ppt/slides/slide20.xml><?xml version="1.0" encoding="utf-8"?>
 <p:sld xmlns:a="http://schemas.openxmlformats.org/drawingml/2006/main" xmlns:p="http://schemas.openxmlformats.org/presentationml/2006/main" xmlns:r="http://schemas.openxmlformats.org/officeDocument/2006/relationships">
   <p:cSld>
     <p:bg>
       <p:bgPr>
-        <a:gradFill rotWithShape="1">
-          <a:gsLst>
-            <a:gs pos="0">
-              <a:schemeClr val="accent1"/>
-            </a:gs>
-            <a:gs pos="55000">
-              <a:schemeClr val="accent2"/>
-            </a:gs>
-            <a:gs pos="100000">
-              <a:schemeClr val="lt1"/>
-            </a:gs>
-          </a:gsLst>
-          <a:path path="circle">
-            <a:fillToRect l="50000" t="50000" r="50000" b="50000"/>
-          </a:path>
-        </a:gradFill>
+        <a:solidFill>
+          <a:srgbClr val="EAF3FF"/>
+        </a:solidFill>
         <a:effectLst/>
       </p:bgPr>
     </p:bg>
@@ -5115,21 +5423,21 @@
             <a:pPr>
               <a:defRPr>
                 <a:solidFill>
-                  <a:schemeClr val="dk1"/>
+                  <a:schemeClr val="accent6"/>
                 </a:solidFill>
               </a:defRPr>
             </a:pPr>
             <a:r>
               <a:rPr>
                 <a:solidFill>
-                  <a:schemeClr val="dk1"/>
-                </a:solidFill>
-              </a:rPr>
-              <a:t>Radial gradient background</a:t>
+                  <a:schemeClr val="accent6"/>
+                </a:solidFill>
+              </a:rPr>
+              <a:t>Background color</a:t>
             </a:r>
             <a:endParaRPr>
               <a:solidFill>
-                <a:schemeClr val="dk1"/>
+                <a:schemeClr val="accent6"/>
               </a:solidFill>
             </a:endParaRPr>
           </a:p>
@@ -5153,10 +5461,19 @@
           <a:lstStyle/>
           <a:p>
             <a:pPr marL="0" indent="0">
+              <a:lnSpc>
+                <a:spcPct val="100000"/>
+              </a:lnSpc>
+              <a:spcBef>
+                <a:spcPts val="1200"/>
+              </a:spcBef>
+              <a:spcAft>
+                <a:spcPts val="600"/>
+              </a:spcAft>
               <a:buNone/>
               <a:defRPr>
                 <a:solidFill>
-                  <a:schemeClr val="dk2"/>
+                  <a:schemeClr val="dk1"/>
                 </a:solidFill>
               </a:defRPr>
             </a:pPr>
@@ -5166,14 +5483,14 @@
                 <a:ea typeface="+mn-ea"/>
                 <a:cs typeface="+mn-cs"/>
                 <a:solidFill>
-                  <a:schemeClr val="dk2"/>
-                </a:solidFill>
-              </a:rPr>
-              <a:t>This slide demonstrates a radial gradient background applied directly to the slide.</a:t>
+                  <a:schemeClr val="dk1"/>
+                </a:solidFill>
+              </a:rPr>
+              <a:t>This slide uses a solid slide background color.</a:t>
             </a:r>
             <a:endParaRPr>
               <a:solidFill>
-                <a:schemeClr val="dk2"/>
+                <a:schemeClr val="dk1"/>
               </a:solidFill>
             </a:endParaRPr>
           </a:p>
@@ -5187,1724 +5504,7 @@
 </p:sld>
 </file>
 
-<file path=ppt/slides/slide12.xml><?xml version="1.0" encoding="utf-8"?>
-<p:sld xmlns:a="http://schemas.openxmlformats.org/drawingml/2006/main" xmlns:p="http://schemas.openxmlformats.org/presentationml/2006/main" xmlns:r="http://schemas.openxmlformats.org/officeDocument/2006/relationships" showMasterSp="0">
-  <p:cSld>
-    <p:bg>
-      <p:bgPr>
-        <a:noFill/>
-        <a:effectLst/>
-      </p:bgPr>
-    </p:bg>
-    <p:spTree>
-      <p:nvGrpSpPr>
-        <p:cNvPr id="1" name=""/>
-        <p:cNvGrpSpPr/>
-        <p:nvPr/>
-      </p:nvGrpSpPr>
-      <p:grpSpPr/>
-      <p:sp>
-        <p:nvSpPr>
-          <p:cNvPr id="2" name="Title 1"/>
-          <p:cNvSpPr>
-            <a:spLocks noGrp="1"/>
-          </p:cNvSpPr>
-          <p:nvPr>
-            <p:ph type="title"/>
-          </p:nvPr>
-        </p:nvSpPr>
-        <p:spPr/>
-        <p:txBody>
-          <a:bodyPr>
-            <a:normAutofit/>
-          </a:bodyPr>
-          <a:lstStyle/>
-          <a:p>
-            <a:pPr>
-              <a:defRPr>
-                <a:solidFill>
-                  <a:schemeClr val="dk1"/>
-                </a:solidFill>
-              </a:defRPr>
-            </a:pPr>
-            <a:r>
-              <a:rPr>
-                <a:solidFill>
-                  <a:schemeClr val="dk1"/>
-                </a:solidFill>
-              </a:rPr>
-              <a:t>No background fill on this slide</a:t>
-            </a:r>
-            <a:endParaRPr>
-              <a:solidFill>
-                <a:schemeClr val="dk1"/>
-              </a:solidFill>
-            </a:endParaRPr>
-          </a:p>
-        </p:txBody>
-      </p:sp>
-    </p:spTree>
-  </p:cSld>
-  <p:clrMapOvr>
-    <a:masterClrMapping/>
-  </p:clrMapOvr>
-</p:sld>
-</file>
-
-<file path=ppt/slides/slide13.xml><?xml version="1.0" encoding="utf-8"?>
-<p:sld xmlns:a="http://schemas.openxmlformats.org/drawingml/2006/main" xmlns:p="http://schemas.openxmlformats.org/presentationml/2006/main" xmlns:r="http://schemas.openxmlformats.org/officeDocument/2006/relationships">
-  <p:cSld>
-    <p:spTree>
-      <p:nvGrpSpPr>
-        <p:cNvPr id="1" name=""/>
-        <p:cNvGrpSpPr/>
-        <p:nvPr/>
-      </p:nvGrpSpPr>
-      <p:grpSpPr/>
-    </p:spTree>
-  </p:cSld>
-  <p:clrMapOvr>
-    <a:masterClrMapping/>
-  </p:clrMapOvr>
-</p:sld>
-</file>
-
-<file path=ppt/slides/slide2.xml><?xml version="1.0" encoding="utf-8"?>
-<p:sld xmlns:a="http://schemas.openxmlformats.org/drawingml/2006/main" xmlns:p="http://schemas.openxmlformats.org/presentationml/2006/main" xmlns:r="http://schemas.openxmlformats.org/officeDocument/2006/relationships">
-  <p:cSld>
-    <p:bg>
-      <p:bgPr>
-        <a:gradFill rotWithShape="1">
-          <a:gsLst>
-            <a:gs pos="0">
-              <a:srgbClr val="0E2841"/>
-            </a:gs>
-            <a:gs pos="100000">
-              <a:srgbClr val="156082"/>
-            </a:gs>
-          </a:gsLst>
-          <a:lin scaled="0" ang="16200000"/>
-        </a:gradFill>
-        <a:effectLst/>
-      </p:bgPr>
-    </p:bg>
-    <p:spTree>
-      <p:nvGrpSpPr>
-        <p:cNvPr id="1" name=""/>
-        <p:cNvGrpSpPr/>
-        <p:nvPr/>
-      </p:nvGrpSpPr>
-      <p:grpSpPr/>
-      <p:sp>
-        <p:nvSpPr>
-          <p:cNvPr id="2" name="Title 1"/>
-          <p:cNvSpPr>
-            <a:spLocks noGrp="1"/>
-          </p:cNvSpPr>
-          <p:nvPr>
-            <p:ph type="title"/>
-          </p:nvPr>
-        </p:nvSpPr>
-        <p:spPr/>
-        <p:txBody>
-          <a:bodyPr>
-            <a:normAutofit/>
-          </a:bodyPr>
-          <a:lstStyle/>
-          <a:p>
-            <a:pPr>
-              <a:defRPr>
-                <a:solidFill>
-                  <a:schemeClr val="dk1"/>
-                </a:solidFill>
-              </a:defRPr>
-            </a:pPr>
-            <a:r>
-              <a:rPr>
-                <a:solidFill>
-                  <a:schemeClr val="dk1"/>
-                </a:solidFill>
-              </a:rPr>
-              <a:t>What this deck demonstrates</a:t>
-            </a:r>
-            <a:endParaRPr>
-              <a:solidFill>
-                <a:schemeClr val="dk1"/>
-              </a:solidFill>
-            </a:endParaRPr>
-          </a:p>
-        </p:txBody>
-      </p:sp>
-      <p:sp>
-        <p:nvSpPr>
-          <p:cNvPr id="3" name="Text Placeholder 2"/>
-          <p:cNvSpPr>
-            <a:spLocks noGrp="1"/>
-          </p:cNvSpPr>
-          <p:nvPr>
-            <p:ph type="body" idx="1"/>
-          </p:nvPr>
-        </p:nvSpPr>
-        <p:spPr/>
-        <p:txBody>
-          <a:bodyPr wrap="square">
-            <a:normAutofit/>
-          </a:bodyPr>
-          <a:lstStyle/>
-          <a:p>
-            <a:pPr marL="0" indent="0">
-              <a:buNone/>
-              <a:defRPr>
-                <a:solidFill>
-                  <a:schemeClr val="dk2"/>
-                </a:solidFill>
-              </a:defRPr>
-            </a:pPr>
-            <a:r>
-              <a:rPr b="0" i="0">
-                <a:latin typeface="+mn-lt"/>
-                <a:ea typeface="+mn-ea"/>
-                <a:cs typeface="+mn-cs"/>
-                <a:solidFill>
-                  <a:schemeClr val="dk2"/>
-                </a:solidFill>
-              </a:rPr>
-              <a:t>Layouts, front matter, lists, headings, code, tables, images, notes, and backgrounds.</a:t>
-            </a:r>
-            <a:endParaRPr>
-              <a:solidFill>
-                <a:schemeClr val="dk2"/>
-              </a:solidFill>
-            </a:endParaRPr>
-          </a:p>
-        </p:txBody>
-      </p:sp>
-    </p:spTree>
-  </p:cSld>
-  <p:clrMapOvr>
-    <a:masterClrMapping/>
-  </p:clrMapOvr>
-</p:sld>
-</file>
-
-<file path=ppt/slides/slide3.xml><?xml version="1.0" encoding="utf-8"?>
-<p:sld xmlns:a="http://schemas.openxmlformats.org/drawingml/2006/main" xmlns:p="http://schemas.openxmlformats.org/presentationml/2006/main" xmlns:r="http://schemas.openxmlformats.org/officeDocument/2006/relationships">
-  <p:cSld>
-    <p:spTree>
-      <p:nvGrpSpPr>
-        <p:cNvPr id="1" name=""/>
-        <p:cNvGrpSpPr/>
-        <p:nvPr/>
-      </p:nvGrpSpPr>
-      <p:grpSpPr/>
-      <p:sp>
-        <p:nvSpPr>
-          <p:cNvPr id="2" name="Title 1"/>
-          <p:cNvSpPr>
-            <a:spLocks noGrp="1"/>
-          </p:cNvSpPr>
-          <p:nvPr>
-            <p:ph type="title"/>
-          </p:nvPr>
-        </p:nvSpPr>
-        <p:spPr/>
-        <p:txBody>
-          <a:bodyPr>
-            <a:normAutofit/>
-          </a:bodyPr>
-          <a:lstStyle/>
-          <a:p>
-            <a:pPr>
-              <a:defRPr>
-                <a:solidFill>
-                  <a:schemeClr val="accent1"/>
-                </a:solidFill>
-              </a:defRPr>
-            </a:pPr>
-            <a:r>
-              <a:rPr>
-                <a:solidFill>
-                  <a:schemeClr val="accent1"/>
-                </a:solidFill>
-              </a:rPr>
-              <a:t>Paragraphs and inline formatting</a:t>
-            </a:r>
-            <a:endParaRPr>
-              <a:solidFill>
-                <a:schemeClr val="accent1"/>
-              </a:solidFill>
-            </a:endParaRPr>
-          </a:p>
-        </p:txBody>
-      </p:sp>
-      <p:sp>
-        <p:nvSpPr>
-          <p:cNvPr id="3" name="Content Placeholder 2"/>
-          <p:cNvSpPr>
-            <a:spLocks noGrp="1"/>
-          </p:cNvSpPr>
-          <p:nvPr>
-            <p:ph idx="1"/>
-          </p:nvPr>
-        </p:nvSpPr>
-        <p:spPr/>
-        <p:txBody>
-          <a:bodyPr wrap="square">
-            <a:normAutofit/>
-          </a:bodyPr>
-          <a:lstStyle/>
-          <a:p>
-            <a:pPr marL="0" indent="0">
-              <a:buNone/>
-              <a:defRPr>
-                <a:solidFill>
-                  <a:schemeClr val="dk1"/>
-                </a:solidFill>
-              </a:defRPr>
-            </a:pPr>
-            <a:r>
-              <a:rPr b="0" i="0">
-                <a:latin typeface="+mn-lt"/>
-                <a:ea typeface="+mn-ea"/>
-                <a:cs typeface="+mn-cs"/>
-                <a:solidFill>
-                  <a:schemeClr val="dk1"/>
-                </a:solidFill>
-              </a:rPr>
-              <a:t>This paragraph shows </a:t>
-            </a:r>
-            <a:r>
-              <a:rPr b="1" i="0">
-                <a:latin typeface="+mn-lt"/>
-                <a:ea typeface="+mn-ea"/>
-                <a:cs typeface="+mn-cs"/>
-                <a:solidFill>
-                  <a:schemeClr val="dk1"/>
-                </a:solidFill>
-              </a:rPr>
-              <a:t>strong text</a:t>
-            </a:r>
-            <a:r>
-              <a:rPr b="0" i="0">
-                <a:latin typeface="+mn-lt"/>
-                <a:ea typeface="+mn-ea"/>
-                <a:cs typeface="+mn-cs"/>
-                <a:solidFill>
-                  <a:schemeClr val="dk1"/>
-                </a:solidFill>
-              </a:rPr>
-              <a:t>, </a:t>
-            </a:r>
-            <a:r>
-              <a:rPr b="0" i="1">
-                <a:latin typeface="+mn-lt"/>
-                <a:ea typeface="+mn-ea"/>
-                <a:cs typeface="+mn-cs"/>
-                <a:solidFill>
-                  <a:schemeClr val="dk1"/>
-                </a:solidFill>
-              </a:rPr>
-              <a:t>emphasis</a:t>
-            </a:r>
-            <a:r>
-              <a:rPr b="0" i="0">
-                <a:latin typeface="+mn-lt"/>
-                <a:ea typeface="+mn-ea"/>
-                <a:cs typeface="+mn-cs"/>
-                <a:solidFill>
-                  <a:schemeClr val="dk1"/>
-                </a:solidFill>
-              </a:rPr>
-              <a:t>, and </a:t>
-            </a:r>
-            <a:r>
-              <a:rPr b="0" i="0">
-                <a:latin typeface="Consolas"/>
-                <a:solidFill>
-                  <a:schemeClr val="dk1"/>
-                </a:solidFill>
-              </a:rPr>
-              <a:t>inline code</a:t>
-            </a:r>
-            <a:r>
-              <a:rPr b="0" i="0">
-                <a:latin typeface="+mn-lt"/>
-                <a:ea typeface="+mn-ea"/>
-                <a:cs typeface="+mn-cs"/>
-                <a:solidFill>
-                  <a:schemeClr val="dk1"/>
-                </a:solidFill>
-              </a:rPr>
-              <a:t> in the body placeholder.</a:t>
-            </a:r>
-            <a:endParaRPr>
-              <a:solidFill>
-                <a:schemeClr val="dk1"/>
-              </a:solidFill>
-            </a:endParaRPr>
-          </a:p>
-          <a:p>
-            <a:pPr marL="0" indent="0">
-              <a:buNone/>
-              <a:defRPr>
-                <a:solidFill>
-                  <a:schemeClr val="dk1"/>
-                </a:solidFill>
-              </a:defRPr>
-            </a:pPr>
-            <a:r>
-              <a:rPr b="0" i="0">
-                <a:latin typeface="+mn-lt"/>
-                <a:ea typeface="+mn-ea"/>
-                <a:cs typeface="+mn-cs"/>
-                <a:solidFill>
-                  <a:schemeClr val="dk1"/>
-                </a:solidFill>
-              </a:rPr>
-              <a:t>Links also work as standard markdown, like </a:t>
-            </a:r>
-            <a:r>
-              <a:rPr b="0" i="0">
-                <a:hlinkClick r:id="rId2"/>
-                <a:latin typeface="+mn-lt"/>
-                <a:ea typeface="+mn-ea"/>
-                <a:cs typeface="+mn-cs"/>
-                <a:solidFill>
-                  <a:schemeClr val="dk1"/>
-                </a:solidFill>
-              </a:rPr>
-              <a:t>python-pptx</a:t>
-            </a:r>
-            <a:r>
-              <a:rPr b="0" i="0">
-                <a:latin typeface="+mn-lt"/>
-                <a:ea typeface="+mn-ea"/>
-                <a:cs typeface="+mn-cs"/>
-                <a:solidFill>
-                  <a:schemeClr val="dk1"/>
-                </a:solidFill>
-              </a:rPr>
-              <a:t> and </a:t>
-            </a:r>
-            <a:r>
-              <a:rPr b="0" i="0">
-                <a:hlinkClick r:id="rId3"/>
-                <a:latin typeface="+mn-lt"/>
-                <a:ea typeface="+mn-ea"/>
-                <a:cs typeface="+mn-cs"/>
-                <a:solidFill>
-                  <a:schemeClr val="dk1"/>
-                </a:solidFill>
-              </a:rPr>
-              <a:t>uv</a:t>
-            </a:r>
-            <a:r>
-              <a:rPr b="0" i="0">
-                <a:latin typeface="+mn-lt"/>
-                <a:ea typeface="+mn-ea"/>
-                <a:cs typeface="+mn-cs"/>
-                <a:solidFill>
-                  <a:schemeClr val="dk1"/>
-                </a:solidFill>
-              </a:rPr>
-              <a:t>.</a:t>
-            </a:r>
-            <a:endParaRPr>
-              <a:solidFill>
-                <a:schemeClr val="dk1"/>
-              </a:solidFill>
-            </a:endParaRPr>
-          </a:p>
-          <a:p>
-            <a:pPr marL="0" indent="0">
-              <a:buNone/>
-              <a:defRPr>
-                <a:solidFill>
-                  <a:schemeClr val="dk1"/>
-                </a:solidFill>
-              </a:defRPr>
-            </a:pPr>
-            <a:r>
-              <a:rPr b="0" i="0">
-                <a:latin typeface="+mn-lt"/>
-                <a:ea typeface="+mn-ea"/>
-                <a:cs typeface="+mn-cs"/>
-                <a:solidFill>
-                  <a:schemeClr val="dk1"/>
-                </a:solidFill>
-              </a:rPr>
-              <a:t>The deck-level font mapping uses the Body font for paragraphs and the Headings font for slide titles and body headings.</a:t>
-            </a:r>
-            <a:endParaRPr>
-              <a:solidFill>
-                <a:schemeClr val="dk1"/>
-              </a:solidFill>
-            </a:endParaRPr>
-          </a:p>
-        </p:txBody>
-      </p:sp>
-    </p:spTree>
-  </p:cSld>
-  <p:clrMapOvr>
-    <a:masterClrMapping/>
-  </p:clrMapOvr>
-</p:sld>
-</file>
-
-<file path=ppt/slides/slide4.xml><?xml version="1.0" encoding="utf-8"?>
-<p:sld xmlns:a="http://schemas.openxmlformats.org/drawingml/2006/main" xmlns:p="http://schemas.openxmlformats.org/presentationml/2006/main" xmlns:r="http://schemas.openxmlformats.org/officeDocument/2006/relationships">
-  <p:cSld>
-    <p:spTree>
-      <p:nvGrpSpPr>
-        <p:cNvPr id="1" name=""/>
-        <p:cNvGrpSpPr/>
-        <p:nvPr/>
-      </p:nvGrpSpPr>
-      <p:grpSpPr/>
-      <p:sp>
-        <p:nvSpPr>
-          <p:cNvPr id="2" name="Title 1"/>
-          <p:cNvSpPr>
-            <a:spLocks noGrp="1"/>
-          </p:cNvSpPr>
-          <p:nvPr>
-            <p:ph type="title"/>
-          </p:nvPr>
-        </p:nvSpPr>
-        <p:spPr/>
-        <p:txBody>
-          <a:bodyPr>
-            <a:normAutofit/>
-          </a:bodyPr>
-          <a:lstStyle/>
-          <a:p>
-            <a:pPr>
-              <a:defRPr>
-                <a:solidFill>
-                  <a:schemeClr val="dk1"/>
-                </a:solidFill>
-              </a:defRPr>
-            </a:pPr>
-            <a:r>
-              <a:rPr>
-                <a:solidFill>
-                  <a:schemeClr val="dk1"/>
-                </a:solidFill>
-              </a:rPr>
-              <a:t>H2 through H6 stay inside the same slide</a:t>
-            </a:r>
-            <a:endParaRPr>
-              <a:solidFill>
-                <a:schemeClr val="dk1"/>
-              </a:solidFill>
-            </a:endParaRPr>
-          </a:p>
-        </p:txBody>
-      </p:sp>
-      <p:sp>
-        <p:nvSpPr>
-          <p:cNvPr id="3" name="Content Placeholder 2"/>
-          <p:cNvSpPr>
-            <a:spLocks noGrp="1"/>
-          </p:cNvSpPr>
-          <p:nvPr>
-            <p:ph idx="1"/>
-          </p:nvPr>
-        </p:nvSpPr>
-        <p:spPr/>
-        <p:txBody>
-          <a:bodyPr wrap="square">
-            <a:normAutofit/>
-          </a:bodyPr>
-          <a:lstStyle/>
-          <a:p>
-            <a:pPr marL="0" indent="0">
-              <a:buNone/>
-              <a:defRPr>
-                <a:solidFill>
-                  <a:schemeClr val="dk2"/>
-                </a:solidFill>
-              </a:defRPr>
-            </a:pPr>
-            <a:r>
-              <a:rPr sz="3700" b="1">
-                <a:latin typeface="+mj-lt"/>
-                <a:ea typeface="+mj-ea"/>
-                <a:cs typeface="+mj-cs"/>
-                <a:solidFill>
-                  <a:schemeClr val="dk2"/>
-                </a:solidFill>
-              </a:rPr>
-              <a:t>H2 heading</a:t>
-            </a:r>
-            <a:endParaRPr>
-              <a:solidFill>
-                <a:schemeClr val="dk2"/>
-              </a:solidFill>
-            </a:endParaRPr>
-          </a:p>
-          <a:p>
-            <a:pPr marL="0" indent="0">
-              <a:buNone/>
-              <a:defRPr>
-                <a:solidFill>
-                  <a:schemeClr val="dk2"/>
-                </a:solidFill>
-              </a:defRPr>
-            </a:pPr>
-            <a:r>
-              <a:rPr b="0" i="0">
-                <a:latin typeface="+mn-lt"/>
-                <a:ea typeface="+mn-ea"/>
-                <a:cs typeface="+mn-cs"/>
-                <a:solidFill>
-                  <a:schemeClr val="dk2"/>
-                </a:solidFill>
-              </a:rPr>
-              <a:t>H2 is rendered in the body flow rather than starting a new slide.</a:t>
-            </a:r>
-            <a:endParaRPr>
-              <a:solidFill>
-                <a:schemeClr val="dk2"/>
-              </a:solidFill>
-            </a:endParaRPr>
-          </a:p>
-          <a:p>
-            <a:pPr marL="0" indent="0">
-              <a:buNone/>
-              <a:defRPr>
-                <a:solidFill>
-                  <a:schemeClr val="dk2"/>
-                </a:solidFill>
-              </a:defRPr>
-            </a:pPr>
-            <a:r>
-              <a:rPr sz="3400" b="1">
-                <a:latin typeface="+mj-lt"/>
-                <a:ea typeface="+mj-ea"/>
-                <a:cs typeface="+mj-cs"/>
-                <a:solidFill>
-                  <a:schemeClr val="dk2"/>
-                </a:solidFill>
-              </a:rPr>
-              <a:t>H3 heading</a:t>
-            </a:r>
-            <a:endParaRPr>
-              <a:solidFill>
-                <a:schemeClr val="dk2"/>
-              </a:solidFill>
-            </a:endParaRPr>
-          </a:p>
-          <a:p>
-            <a:pPr marL="0" indent="0">
-              <a:buNone/>
-              <a:defRPr>
-                <a:solidFill>
-                  <a:schemeClr val="dk2"/>
-                </a:solidFill>
-              </a:defRPr>
-            </a:pPr>
-            <a:r>
-              <a:rPr b="0" i="0">
-                <a:latin typeface="+mn-lt"/>
-                <a:ea typeface="+mn-ea"/>
-                <a:cs typeface="+mn-cs"/>
-                <a:solidFill>
-                  <a:schemeClr val="dk2"/>
-                </a:solidFill>
-              </a:rPr>
-              <a:t>This keeps the markdown readable while still allowing structure inside a slide.</a:t>
-            </a:r>
-            <a:endParaRPr>
-              <a:solidFill>
-                <a:schemeClr val="dk2"/>
-              </a:solidFill>
-            </a:endParaRPr>
-          </a:p>
-          <a:p>
-            <a:pPr marL="0" indent="0">
-              <a:buNone/>
-              <a:defRPr>
-                <a:solidFill>
-                  <a:schemeClr val="dk2"/>
-                </a:solidFill>
-              </a:defRPr>
-            </a:pPr>
-            <a:r>
-              <a:rPr sz="3100" b="1">
-                <a:latin typeface="+mj-lt"/>
-                <a:ea typeface="+mj-ea"/>
-                <a:cs typeface="+mj-cs"/>
-                <a:solidFill>
-                  <a:schemeClr val="dk2"/>
-                </a:solidFill>
-              </a:rPr>
-              <a:t>H4 heading</a:t>
-            </a:r>
-            <a:endParaRPr>
-              <a:solidFill>
-                <a:schemeClr val="dk2"/>
-              </a:solidFill>
-            </a:endParaRPr>
-          </a:p>
-          <a:p>
-            <a:pPr marL="0" indent="0">
-              <a:buNone/>
-              <a:defRPr>
-                <a:solidFill>
-                  <a:schemeClr val="dk2"/>
-                </a:solidFill>
-              </a:defRPr>
-            </a:pPr>
-            <a:r>
-              <a:rPr b="0" i="0">
-                <a:latin typeface="+mn-lt"/>
-                <a:ea typeface="+mn-ea"/>
-                <a:cs typeface="+mn-cs"/>
-                <a:solidFill>
-                  <a:schemeClr val="dk2"/>
-                </a:solidFill>
-              </a:rPr>
-              <a:t>The renderer applies descending heading sizes.</a:t>
-            </a:r>
-            <a:endParaRPr>
-              <a:solidFill>
-                <a:schemeClr val="dk2"/>
-              </a:solidFill>
-            </a:endParaRPr>
-          </a:p>
-          <a:p>
-            <a:pPr marL="0" indent="0">
-              <a:buNone/>
-              <a:defRPr>
-                <a:solidFill>
-                  <a:schemeClr val="dk2"/>
-                </a:solidFill>
-              </a:defRPr>
-            </a:pPr>
-            <a:r>
-              <a:rPr sz="2900" b="1">
-                <a:latin typeface="+mj-lt"/>
-                <a:ea typeface="+mj-ea"/>
-                <a:cs typeface="+mj-cs"/>
-                <a:solidFill>
-                  <a:schemeClr val="dk2"/>
-                </a:solidFill>
-              </a:rPr>
-              <a:t>H5 heading</a:t>
-            </a:r>
-            <a:endParaRPr>
-              <a:solidFill>
-                <a:schemeClr val="dk2"/>
-              </a:solidFill>
-            </a:endParaRPr>
-          </a:p>
-          <a:p>
-            <a:pPr marL="0" indent="0">
-              <a:buNone/>
-              <a:defRPr>
-                <a:solidFill>
-                  <a:schemeClr val="dk2"/>
-                </a:solidFill>
-              </a:defRPr>
-            </a:pPr>
-            <a:r>
-              <a:rPr b="0" i="0">
-                <a:latin typeface="+mn-lt"/>
-                <a:ea typeface="+mn-ea"/>
-                <a:cs typeface="+mn-cs"/>
-                <a:solidFill>
-                  <a:schemeClr val="dk2"/>
-                </a:solidFill>
-              </a:rPr>
-              <a:t>H5 still stays clearly above body text.</a:t>
-            </a:r>
-            <a:endParaRPr>
-              <a:solidFill>
-                <a:schemeClr val="dk2"/>
-              </a:solidFill>
-            </a:endParaRPr>
-          </a:p>
-          <a:p>
-            <a:pPr marL="0" indent="0">
-              <a:buNone/>
-              <a:defRPr>
-                <a:solidFill>
-                  <a:schemeClr val="dk2"/>
-                </a:solidFill>
-              </a:defRPr>
-            </a:pPr>
-            <a:r>
-              <a:rPr sz="2800" b="1">
-                <a:latin typeface="+mj-lt"/>
-                <a:ea typeface="+mj-ea"/>
-                <a:cs typeface="+mj-cs"/>
-                <a:solidFill>
-                  <a:schemeClr val="dk2"/>
-                </a:solidFill>
-              </a:rPr>
-              <a:t>H6 heading</a:t>
-            </a:r>
-            <a:endParaRPr>
-              <a:solidFill>
-                <a:schemeClr val="dk2"/>
-              </a:solidFill>
-            </a:endParaRPr>
-          </a:p>
-          <a:p>
-            <a:pPr marL="0" indent="0">
-              <a:buNone/>
-              <a:defRPr>
-                <a:solidFill>
-                  <a:schemeClr val="dk2"/>
-                </a:solidFill>
-              </a:defRPr>
-            </a:pPr>
-            <a:r>
-              <a:rPr b="0" i="0">
-                <a:latin typeface="+mn-lt"/>
-                <a:ea typeface="+mn-ea"/>
-                <a:cs typeface="+mn-cs"/>
-                <a:solidFill>
-                  <a:schemeClr val="dk2"/>
-                </a:solidFill>
-              </a:rPr>
-              <a:t>H6 is supported too.</a:t>
-            </a:r>
-            <a:endParaRPr>
-              <a:solidFill>
-                <a:schemeClr val="dk2"/>
-              </a:solidFill>
-            </a:endParaRPr>
-          </a:p>
-        </p:txBody>
-      </p:sp>
-    </p:spTree>
-  </p:cSld>
-  <p:clrMapOvr>
-    <a:masterClrMapping/>
-  </p:clrMapOvr>
-</p:sld>
-</file>
-
-<file path=ppt/slides/slide5.xml><?xml version="1.0" encoding="utf-8"?>
-<p:sld xmlns:a="http://schemas.openxmlformats.org/drawingml/2006/main" xmlns:p="http://schemas.openxmlformats.org/presentationml/2006/main" xmlns:r="http://schemas.openxmlformats.org/officeDocument/2006/relationships">
-  <p:cSld>
-    <p:spTree>
-      <p:nvGrpSpPr>
-        <p:cNvPr id="1" name=""/>
-        <p:cNvGrpSpPr/>
-        <p:nvPr/>
-      </p:nvGrpSpPr>
-      <p:grpSpPr/>
-      <p:sp>
-        <p:nvSpPr>
-          <p:cNvPr id="2" name="Title 1"/>
-          <p:cNvSpPr>
-            <a:spLocks noGrp="1"/>
-          </p:cNvSpPr>
-          <p:nvPr>
-            <p:ph type="title"/>
-          </p:nvPr>
-        </p:nvSpPr>
-        <p:spPr/>
-        <p:txBody>
-          <a:bodyPr>
-            <a:normAutofit/>
-          </a:bodyPr>
-          <a:lstStyle/>
-          <a:p>
-            <a:pPr>
-              <a:defRPr>
-                <a:solidFill>
-                  <a:schemeClr val="dk1"/>
-                </a:solidFill>
-              </a:defRPr>
-            </a:pPr>
-            <a:r>
-              <a:rPr>
-                <a:solidFill>
-                  <a:schemeClr val="dk1"/>
-                </a:solidFill>
-              </a:rPr>
-              <a:t>Lists</a:t>
-            </a:r>
-            <a:endParaRPr>
-              <a:solidFill>
-                <a:schemeClr val="dk1"/>
-              </a:solidFill>
-            </a:endParaRPr>
-          </a:p>
-        </p:txBody>
-      </p:sp>
-      <p:sp>
-        <p:nvSpPr>
-          <p:cNvPr id="3" name="Content Placeholder 2"/>
-          <p:cNvSpPr>
-            <a:spLocks noGrp="1"/>
-          </p:cNvSpPr>
-          <p:nvPr>
-            <p:ph idx="1"/>
-          </p:nvPr>
-        </p:nvSpPr>
-        <p:spPr/>
-        <p:txBody>
-          <a:bodyPr wrap="square">
-            <a:normAutofit/>
-          </a:bodyPr>
-          <a:lstStyle/>
-          <a:p>
-            <a:pPr marL="0" indent="0">
-              <a:buNone/>
-              <a:defRPr>
-                <a:solidFill>
-                  <a:schemeClr val="dk2"/>
-                </a:solidFill>
-              </a:defRPr>
-            </a:pPr>
-            <a:r>
-              <a:rPr sz="3700" b="1">
-                <a:latin typeface="+mj-lt"/>
-                <a:ea typeface="+mj-ea"/>
-                <a:cs typeface="+mj-cs"/>
-                <a:solidFill>
-                  <a:schemeClr val="dk2"/>
-                </a:solidFill>
-              </a:rPr>
-              <a:t>Bulleted list</a:t>
-            </a:r>
-            <a:endParaRPr>
-              <a:solidFill>
-                <a:schemeClr val="dk2"/>
-              </a:solidFill>
-            </a:endParaRPr>
-          </a:p>
-          <a:p>
-            <a:pPr>
-              <a:defRPr>
-                <a:solidFill>
-                  <a:schemeClr val="dk2"/>
-                </a:solidFill>
-              </a:defRPr>
-            </a:pPr>
-            <a:r>
-              <a:rPr b="0" i="0">
-                <a:latin typeface="+mn-lt"/>
-                <a:ea typeface="+mn-ea"/>
-                <a:cs typeface="+mn-cs"/>
-                <a:solidFill>
-                  <a:schemeClr val="dk2"/>
-                </a:solidFill>
-              </a:rPr>
-              <a:t>First bullet</a:t>
-            </a:r>
-            <a:endParaRPr>
-              <a:solidFill>
-                <a:schemeClr val="dk2"/>
-              </a:solidFill>
-            </a:endParaRPr>
-          </a:p>
-          <a:p>
-            <a:pPr lvl="1">
-              <a:defRPr>
-                <a:solidFill>
-                  <a:schemeClr val="dk2"/>
-                </a:solidFill>
-              </a:defRPr>
-            </a:pPr>
-            <a:r>
-              <a:rPr b="0" i="0">
-                <a:latin typeface="+mn-lt"/>
-                <a:ea typeface="+mn-ea"/>
-                <a:cs typeface="+mn-cs"/>
-                <a:solidFill>
-                  <a:schemeClr val="dk2"/>
-                </a:solidFill>
-              </a:rPr>
-              <a:t>Nested bullet level two</a:t>
-            </a:r>
-            <a:endParaRPr>
-              <a:solidFill>
-                <a:schemeClr val="dk2"/>
-              </a:solidFill>
-            </a:endParaRPr>
-          </a:p>
-          <a:p>
-            <a:pPr lvl="2">
-              <a:defRPr>
-                <a:solidFill>
-                  <a:schemeClr val="dk2"/>
-                </a:solidFill>
-              </a:defRPr>
-            </a:pPr>
-            <a:r>
-              <a:rPr b="0" i="0">
-                <a:latin typeface="+mn-lt"/>
-                <a:ea typeface="+mn-ea"/>
-                <a:cs typeface="+mn-cs"/>
-                <a:solidFill>
-                  <a:schemeClr val="dk2"/>
-                </a:solidFill>
-              </a:rPr>
-              <a:t>Nested bullet level three</a:t>
-            </a:r>
-            <a:endParaRPr>
-              <a:solidFill>
-                <a:schemeClr val="dk2"/>
-              </a:solidFill>
-            </a:endParaRPr>
-          </a:p>
-          <a:p>
-            <a:pPr>
-              <a:defRPr>
-                <a:solidFill>
-                  <a:schemeClr val="dk2"/>
-                </a:solidFill>
-              </a:defRPr>
-            </a:pPr>
-            <a:r>
-              <a:rPr b="0" i="0">
-                <a:latin typeface="+mn-lt"/>
-                <a:ea typeface="+mn-ea"/>
-                <a:cs typeface="+mn-cs"/>
-                <a:solidFill>
-                  <a:schemeClr val="dk2"/>
-                </a:solidFill>
-              </a:rPr>
-              <a:t>Second bullet</a:t>
-            </a:r>
-            <a:endParaRPr>
-              <a:solidFill>
-                <a:schemeClr val="dk2"/>
-              </a:solidFill>
-            </a:endParaRPr>
-          </a:p>
-          <a:p>
-            <a:pPr marL="0" indent="0">
-              <a:buNone/>
-              <a:defRPr>
-                <a:solidFill>
-                  <a:schemeClr val="dk2"/>
-                </a:solidFill>
-              </a:defRPr>
-            </a:pPr>
-            <a:r>
-              <a:rPr sz="3700" b="1">
-                <a:latin typeface="+mj-lt"/>
-                <a:ea typeface="+mj-ea"/>
-                <a:cs typeface="+mj-cs"/>
-                <a:solidFill>
-                  <a:schemeClr val="dk2"/>
-                </a:solidFill>
-              </a:rPr>
-              <a:t>Ordered list</a:t>
-            </a:r>
-            <a:endParaRPr>
-              <a:solidFill>
-                <a:schemeClr val="dk2"/>
-              </a:solidFill>
-            </a:endParaRPr>
-          </a:p>
-          <a:p>
-            <a:pPr>
-              <a:buAutoNum type="arabicPeriod" startAt="1"/>
-              <a:defRPr>
-                <a:solidFill>
-                  <a:schemeClr val="dk2"/>
-                </a:solidFill>
-              </a:defRPr>
-            </a:pPr>
-            <a:r>
-              <a:rPr b="0" i="0">
-                <a:latin typeface="+mn-lt"/>
-                <a:ea typeface="+mn-ea"/>
-                <a:cs typeface="+mn-cs"/>
-                <a:solidFill>
-                  <a:schemeClr val="dk2"/>
-                </a:solidFill>
-              </a:rPr>
-              <a:t>First step</a:t>
-            </a:r>
-            <a:endParaRPr>
-              <a:solidFill>
-                <a:schemeClr val="dk2"/>
-              </a:solidFill>
-            </a:endParaRPr>
-          </a:p>
-          <a:p>
-            <a:pPr>
-              <a:buAutoNum type="arabicPeriod" startAt="2"/>
-              <a:defRPr>
-                <a:solidFill>
-                  <a:schemeClr val="dk2"/>
-                </a:solidFill>
-              </a:defRPr>
-            </a:pPr>
-            <a:r>
-              <a:rPr b="0" i="0">
-                <a:latin typeface="+mn-lt"/>
-                <a:ea typeface="+mn-ea"/>
-                <a:cs typeface="+mn-cs"/>
-                <a:solidFill>
-                  <a:schemeClr val="dk2"/>
-                </a:solidFill>
-              </a:rPr>
-              <a:t>Second step</a:t>
-            </a:r>
-            <a:endParaRPr>
-              <a:solidFill>
-                <a:schemeClr val="dk2"/>
-              </a:solidFill>
-            </a:endParaRPr>
-          </a:p>
-          <a:p>
-            <a:pPr lvl="1">
-              <a:buAutoNum type="arabicPeriod" startAt="1"/>
-              <a:defRPr>
-                <a:solidFill>
-                  <a:schemeClr val="dk2"/>
-                </a:solidFill>
-              </a:defRPr>
-            </a:pPr>
-            <a:r>
-              <a:rPr b="0" i="0">
-                <a:latin typeface="+mn-lt"/>
-                <a:ea typeface="+mn-ea"/>
-                <a:cs typeface="+mn-cs"/>
-                <a:solidFill>
-                  <a:schemeClr val="dk2"/>
-                </a:solidFill>
-              </a:rPr>
-              <a:t>Nested ordered item</a:t>
-            </a:r>
-            <a:endParaRPr>
-              <a:solidFill>
-                <a:schemeClr val="dk2"/>
-              </a:solidFill>
-            </a:endParaRPr>
-          </a:p>
-          <a:p>
-            <a:pPr lvl="1">
-              <a:buAutoNum type="arabicPeriod" startAt="2"/>
-              <a:defRPr>
-                <a:solidFill>
-                  <a:schemeClr val="dk2"/>
-                </a:solidFill>
-              </a:defRPr>
-            </a:pPr>
-            <a:r>
-              <a:rPr b="0" i="0">
-                <a:latin typeface="+mn-lt"/>
-                <a:ea typeface="+mn-ea"/>
-                <a:cs typeface="+mn-cs"/>
-                <a:solidFill>
-                  <a:schemeClr val="dk2"/>
-                </a:solidFill>
-              </a:rPr>
-              <a:t>Another nested ordered item</a:t>
-            </a:r>
-            <a:endParaRPr>
-              <a:solidFill>
-                <a:schemeClr val="dk2"/>
-              </a:solidFill>
-            </a:endParaRPr>
-          </a:p>
-          <a:p>
-            <a:pPr>
-              <a:buAutoNum type="arabicPeriod" startAt="3"/>
-              <a:defRPr>
-                <a:solidFill>
-                  <a:schemeClr val="dk2"/>
-                </a:solidFill>
-              </a:defRPr>
-            </a:pPr>
-            <a:r>
-              <a:rPr b="0" i="0">
-                <a:latin typeface="+mn-lt"/>
-                <a:ea typeface="+mn-ea"/>
-                <a:cs typeface="+mn-cs"/>
-                <a:solidFill>
-                  <a:schemeClr val="dk2"/>
-                </a:solidFill>
-              </a:rPr>
-              <a:t>Third step</a:t>
-            </a:r>
-            <a:endParaRPr>
-              <a:solidFill>
-                <a:schemeClr val="dk2"/>
-              </a:solidFill>
-            </a:endParaRPr>
-          </a:p>
-        </p:txBody>
-      </p:sp>
-    </p:spTree>
-  </p:cSld>
-  <p:clrMapOvr>
-    <a:masterClrMapping/>
-  </p:clrMapOvr>
-</p:sld>
-</file>
-
-<file path=ppt/slides/slide6.xml><?xml version="1.0" encoding="utf-8"?>
-<p:sld xmlns:a="http://schemas.openxmlformats.org/drawingml/2006/main" xmlns:p="http://schemas.openxmlformats.org/presentationml/2006/main" xmlns:r="http://schemas.openxmlformats.org/officeDocument/2006/relationships">
-  <p:cSld>
-    <p:spTree>
-      <p:nvGrpSpPr>
-        <p:cNvPr id="1" name=""/>
-        <p:cNvGrpSpPr/>
-        <p:nvPr/>
-      </p:nvGrpSpPr>
-      <p:grpSpPr/>
-      <p:sp>
-        <p:nvSpPr>
-          <p:cNvPr id="2" name="Title 1"/>
-          <p:cNvSpPr>
-            <a:spLocks noGrp="1"/>
-          </p:cNvSpPr>
-          <p:nvPr>
-            <p:ph type="title"/>
-          </p:nvPr>
-        </p:nvSpPr>
-        <p:spPr/>
-        <p:txBody>
-          <a:bodyPr>
-            <a:normAutofit/>
-          </a:bodyPr>
-          <a:lstStyle/>
-          <a:p>
-            <a:pPr>
-              <a:defRPr>
-                <a:solidFill>
-                  <a:schemeClr val="dk1"/>
-                </a:solidFill>
-              </a:defRPr>
-            </a:pPr>
-            <a:r>
-              <a:rPr>
-                <a:solidFill>
-                  <a:schemeClr val="dk1"/>
-                </a:solidFill>
-              </a:rPr>
-              <a:t>Blockquotes and fenced code</a:t>
-            </a:r>
-            <a:endParaRPr>
-              <a:solidFill>
-                <a:schemeClr val="dk1"/>
-              </a:solidFill>
-            </a:endParaRPr>
-          </a:p>
-        </p:txBody>
-      </p:sp>
-      <p:sp>
-        <p:nvSpPr>
-          <p:cNvPr id="3" name="Content Placeholder 2"/>
-          <p:cNvSpPr>
-            <a:spLocks noGrp="1"/>
-          </p:cNvSpPr>
-          <p:nvPr>
-            <p:ph idx="1"/>
-          </p:nvPr>
-        </p:nvSpPr>
-        <p:spPr/>
-        <p:txBody>
-          <a:bodyPr wrap="square">
-            <a:normAutofit/>
-          </a:bodyPr>
-          <a:lstStyle/>
-          <a:p>
-            <a:pPr marL="0" indent="0">
-              <a:spcBef>
-                <a:spcPts val="600"/>
-              </a:spcBef>
-              <a:spcAft>
-                <a:spcPts val="600"/>
-              </a:spcAft>
-              <a:buNone/>
-            </a:pPr>
-            <a:r>
-              <a:rPr i="1">
-                <a:latin typeface="+mn-lt"/>
-                <a:ea typeface="+mn-ea"/>
-                <a:cs typeface="+mn-cs"/>
-                <a:solidFill>
-                  <a:schemeClr val="accent1"/>
-                </a:solidFill>
-              </a:rPr>
-              <a:t>This blockquote stays in the text flow and renders as styled text in the body placeholder.</a:t>
-            </a:r>
-          </a:p>
-          <a:p>
-            <a:pPr marL="0" indent="0">
-              <a:buNone/>
-              <a:defRPr>
-                <a:solidFill>
-                  <a:schemeClr val="dk2"/>
-                </a:solidFill>
-              </a:defRPr>
-            </a:pPr>
-            <a:r>
-              <a:rPr b="0" i="0">
-                <a:latin typeface="Consolas"/>
-                <a:solidFill>
-                  <a:schemeClr val="dk2"/>
-                </a:solidFill>
-              </a:rPr>
-              <a:t>def render_slide(title: str, body: str) -&gt; str:</a:t>
-            </a:r>
-            <a:endParaRPr>
-              <a:solidFill>
-                <a:schemeClr val="dk2"/>
-              </a:solidFill>
-            </a:endParaRPr>
-          </a:p>
-          <a:p>
-            <a:pPr marL="0" indent="0">
-              <a:buNone/>
-              <a:defRPr>
-                <a:solidFill>
-                  <a:schemeClr val="dk2"/>
-                </a:solidFill>
-              </a:defRPr>
-            </a:pPr>
-            <a:r>
-              <a:rPr b="0" i="0">
-                <a:latin typeface="Consolas"/>
-                <a:solidFill>
-                  <a:schemeClr val="dk2"/>
-                </a:solidFill>
-              </a:rPr>
-              <a:t>    return f"{title}: {body}"</a:t>
-            </a:r>
-            <a:endParaRPr>
-              <a:solidFill>
-                <a:schemeClr val="dk2"/>
-              </a:solidFill>
-            </a:endParaRPr>
-          </a:p>
-        </p:txBody>
-      </p:sp>
-    </p:spTree>
-  </p:cSld>
-  <p:clrMapOvr>
-    <a:masterClrMapping/>
-  </p:clrMapOvr>
-</p:sld>
-</file>
-
-<file path=ppt/slides/slide7.xml><?xml version="1.0" encoding="utf-8"?>
-<p:sld xmlns:a="http://schemas.openxmlformats.org/drawingml/2006/main" xmlns:p="http://schemas.openxmlformats.org/presentationml/2006/main" xmlns:r="http://schemas.openxmlformats.org/officeDocument/2006/relationships">
-  <p:cSld>
-    <p:spTree>
-      <p:nvGrpSpPr>
-        <p:cNvPr id="1" name=""/>
-        <p:cNvGrpSpPr/>
-        <p:nvPr/>
-      </p:nvGrpSpPr>
-      <p:grpSpPr/>
-      <p:sp>
-        <p:nvSpPr>
-          <p:cNvPr id="2" name="Title 1"/>
-          <p:cNvSpPr>
-            <a:spLocks noGrp="1"/>
-          </p:cNvSpPr>
-          <p:nvPr>
-            <p:ph type="title"/>
-          </p:nvPr>
-        </p:nvSpPr>
-        <p:spPr/>
-        <p:txBody>
-          <a:bodyPr>
-            <a:normAutofit/>
-          </a:bodyPr>
-          <a:lstStyle/>
-          <a:p>
-            <a:pPr>
-              <a:defRPr>
-                <a:solidFill>
-                  <a:schemeClr val="dk1"/>
-                </a:solidFill>
-              </a:defRPr>
-            </a:pPr>
-            <a:r>
-              <a:rPr>
-                <a:solidFill>
-                  <a:schemeClr val="dk1"/>
-                </a:solidFill>
-              </a:rPr>
-              <a:t>Pipe table</a:t>
-            </a:r>
-            <a:endParaRPr>
-              <a:solidFill>
-                <a:schemeClr val="dk1"/>
-              </a:solidFill>
-            </a:endParaRPr>
-          </a:p>
-        </p:txBody>
-      </p:sp>
-      <p:sp>
-        <p:nvSpPr>
-          <p:cNvPr id="3" name="Content Placeholder 2"/>
-          <p:cNvSpPr>
-            <a:spLocks noGrp="1"/>
-          </p:cNvSpPr>
-          <p:nvPr>
-            <p:ph idx="1"/>
-          </p:nvPr>
-        </p:nvSpPr>
-        <p:spPr/>
-        <p:txBody>
-          <a:bodyPr/>
-          <a:lstStyle/>
-          <a:p/>
-        </p:txBody>
-      </p:sp>
-      <p:graphicFrame>
-        <p:nvGraphicFramePr>
-          <p:cNvPr id="4" name="MarkdownSlidesTable"/>
-          <p:cNvGraphicFramePr>
-            <a:graphicFrameLocks noGrp="1"/>
-          </p:cNvGraphicFramePr>
-          <p:nvPr/>
-        </p:nvGraphicFramePr>
-        <p:xfrm>
-          <a:off x="838200" y="1825625"/>
-          <a:ext cx="10515600" cy="4351338"/>
-        </p:xfrm>
-        <a:graphic>
-          <a:graphicData uri="http://schemas.openxmlformats.org/drawingml/2006/table">
-            <a:tbl>
-              <a:tblPr firstRow="1" bandRow="1">
-                <a:tableStyleId>{B301B821-A1FF-4177-AEE7-76D212191A09}</a:tableStyleId>
-              </a:tblPr>
-              <a:tblGrid>
-                <a:gridCol w="3505200"/>
-                <a:gridCol w="3505200"/>
-                <a:gridCol w="3505200"/>
-              </a:tblGrid>
-              <a:tr h="1087834">
-                <a:tc>
-                  <a:txBody>
-                    <a:bodyPr/>
-                    <a:lstStyle/>
-                    <a:p>
-                      <a:r>
-                        <a:rPr>
-                          <a:latin typeface="+mn-lt"/>
-                          <a:ea typeface="+mn-ea"/>
-                          <a:cs typeface="+mn-cs"/>
-                        </a:rPr>
-                        <a:t>Feature</a:t>
-                      </a:r>
-                    </a:p>
-                  </a:txBody>
-                  <a:tcPr/>
-                </a:tc>
-                <a:tc>
-                  <a:txBody>
-                    <a:bodyPr/>
-                    <a:lstStyle/>
-                    <a:p>
-                      <a:r>
-                        <a:rPr>
-                          <a:latin typeface="+mn-lt"/>
-                          <a:ea typeface="+mn-ea"/>
-                          <a:cs typeface="+mn-cs"/>
-                        </a:rPr>
-                        <a:t>Status</a:t>
-                      </a:r>
-                    </a:p>
-                  </a:txBody>
-                  <a:tcPr/>
-                </a:tc>
-                <a:tc>
-                  <a:txBody>
-                    <a:bodyPr/>
-                    <a:lstStyle/>
-                    <a:p>
-                      <a:r>
-                        <a:rPr>
-                          <a:latin typeface="+mn-lt"/>
-                          <a:ea typeface="+mn-ea"/>
-                          <a:cs typeface="+mn-cs"/>
-                        </a:rPr>
-                        <a:t>Notes</a:t>
-                      </a:r>
-                    </a:p>
-                  </a:txBody>
-                  <a:tcPr/>
-                </a:tc>
-              </a:tr>
-              <a:tr h="1087834">
-                <a:tc>
-                  <a:txBody>
-                    <a:bodyPr/>
-                    <a:lstStyle/>
-                    <a:p>
-                      <a:r>
-                        <a:rPr>
-                          <a:latin typeface="+mn-lt"/>
-                          <a:ea typeface="+mn-ea"/>
-                          <a:cs typeface="+mn-cs"/>
-                        </a:rPr>
-                        <a:t>H1 slide boundaries</a:t>
-                      </a:r>
-                    </a:p>
-                  </a:txBody>
-                  <a:tcPr/>
-                </a:tc>
-                <a:tc>
-                  <a:txBody>
-                    <a:bodyPr/>
-                    <a:lstStyle/>
-                    <a:p>
-                      <a:r>
-                        <a:rPr>
-                          <a:latin typeface="+mn-lt"/>
-                          <a:ea typeface="+mn-ea"/>
-                          <a:cs typeface="+mn-cs"/>
-                        </a:rPr>
-                        <a:t>Supported</a:t>
-                      </a:r>
-                    </a:p>
-                  </a:txBody>
-                  <a:tcPr/>
-                </a:tc>
-                <a:tc>
-                  <a:txBody>
-                    <a:bodyPr/>
-                    <a:lstStyle/>
-                    <a:p>
-                      <a:r>
-                        <a:rPr>
-                          <a:latin typeface="+mn-lt"/>
-                          <a:ea typeface="+mn-ea"/>
-                          <a:cs typeface="+mn-cs"/>
-                        </a:rPr>
-                        <a:t># Heading starts a new slide</a:t>
-                      </a:r>
-                    </a:p>
-                  </a:txBody>
-                  <a:tcPr/>
-                </a:tc>
-              </a:tr>
-              <a:tr h="1087834">
-                <a:tc>
-                  <a:txBody>
-                    <a:bodyPr/>
-                    <a:lstStyle/>
-                    <a:p>
-                      <a:r>
-                        <a:rPr>
-                          <a:latin typeface="+mn-lt"/>
-                          <a:ea typeface="+mn-ea"/>
-                          <a:cs typeface="+mn-cs"/>
-                        </a:rPr>
-                        <a:t>Slide front matter</a:t>
-                      </a:r>
-                    </a:p>
-                  </a:txBody>
-                  <a:tcPr/>
-                </a:tc>
-                <a:tc>
-                  <a:txBody>
-                    <a:bodyPr/>
-                    <a:lstStyle/>
-                    <a:p>
-                      <a:r>
-                        <a:rPr>
-                          <a:latin typeface="+mn-lt"/>
-                          <a:ea typeface="+mn-ea"/>
-                          <a:cs typeface="+mn-cs"/>
-                        </a:rPr>
-                        <a:t>Supported</a:t>
-                      </a:r>
-                    </a:p>
-                  </a:txBody>
-                  <a:tcPr/>
-                </a:tc>
-                <a:tc>
-                  <a:txBody>
-                    <a:bodyPr/>
-                    <a:lstStyle/>
-                    <a:p>
-                      <a:r>
-                        <a:rPr>
-                          <a:latin typeface="+mn-lt"/>
-                          <a:ea typeface="+mn-ea"/>
-                          <a:cs typeface="+mn-cs"/>
-                        </a:rPr>
-                        <a:t>Allowed only immediately after an H1</a:t>
-                      </a:r>
-                    </a:p>
-                  </a:txBody>
-                  <a:tcPr/>
-                </a:tc>
-              </a:tr>
-              <a:tr h="1087836">
-                <a:tc>
-                  <a:txBody>
-                    <a:bodyPr/>
-                    <a:lstStyle/>
-                    <a:p>
-                      <a:r>
-                        <a:rPr>
-                          <a:latin typeface="+mn-lt"/>
-                          <a:ea typeface="+mn-ea"/>
-                          <a:cs typeface="+mn-cs"/>
-                        </a:rPr>
-                        <a:t>Placeholder fallback textboxes</a:t>
-                      </a:r>
-                    </a:p>
-                  </a:txBody>
-                  <a:tcPr/>
-                </a:tc>
-                <a:tc>
-                  <a:txBody>
-                    <a:bodyPr/>
-                    <a:lstStyle/>
-                    <a:p>
-                      <a:r>
-                        <a:rPr>
-                          <a:latin typeface="+mn-lt"/>
-                          <a:ea typeface="+mn-ea"/>
-                          <a:cs typeface="+mn-cs"/>
-                        </a:rPr>
-                        <a:t>Not supported</a:t>
-                      </a:r>
-                    </a:p>
-                  </a:txBody>
-                  <a:tcPr/>
-                </a:tc>
-                <a:tc>
-                  <a:txBody>
-                    <a:bodyPr/>
-                    <a:lstStyle/>
-                    <a:p>
-                      <a:r>
-                        <a:rPr>
-                          <a:latin typeface="+mn-lt"/>
-                          <a:ea typeface="+mn-ea"/>
-                          <a:cs typeface="+mn-cs"/>
-                        </a:rPr>
-                        <a:t>Missing required placeholders are errors</a:t>
-                      </a:r>
-                    </a:p>
-                  </a:txBody>
-                  <a:tcPr/>
-                </a:tc>
-              </a:tr>
-            </a:tbl>
-          </a:graphicData>
-        </a:graphic>
-      </p:graphicFrame>
-    </p:spTree>
-  </p:cSld>
-  <p:clrMapOvr>
-    <a:masterClrMapping/>
-  </p:clrMapOvr>
-</p:sld>
-</file>
-
-<file path=ppt/slides/slide8.xml><?xml version="1.0" encoding="utf-8"?>
-<p:sld xmlns:a="http://schemas.openxmlformats.org/drawingml/2006/main" xmlns:p="http://schemas.openxmlformats.org/presentationml/2006/main" xmlns:r="http://schemas.openxmlformats.org/officeDocument/2006/relationships">
-  <p:cSld>
-    <p:spTree>
-      <p:nvGrpSpPr>
-        <p:cNvPr id="1" name=""/>
-        <p:cNvGrpSpPr/>
-        <p:nvPr/>
-      </p:nvGrpSpPr>
-      <p:grpSpPr/>
-      <p:sp>
-        <p:nvSpPr>
-          <p:cNvPr id="2" name="Title 1"/>
-          <p:cNvSpPr>
-            <a:spLocks noGrp="1"/>
-          </p:cNvSpPr>
-          <p:nvPr>
-            <p:ph type="title"/>
-          </p:nvPr>
-        </p:nvSpPr>
-        <p:spPr/>
-        <p:txBody>
-          <a:bodyPr>
-            <a:normAutofit/>
-          </a:bodyPr>
-          <a:lstStyle/>
-          <a:p>
-            <a:pPr>
-              <a:defRPr>
-                <a:solidFill>
-                  <a:schemeClr val="dk1"/>
-                </a:solidFill>
-              </a:defRPr>
-            </a:pPr>
-            <a:r>
-              <a:rPr>
-                <a:solidFill>
-                  <a:schemeClr val="dk1"/>
-                </a:solidFill>
-              </a:rPr>
-              <a:t>Local image</a:t>
-            </a:r>
-            <a:endParaRPr>
-              <a:solidFill>
-                <a:schemeClr val="dk1"/>
-              </a:solidFill>
-            </a:endParaRPr>
-          </a:p>
-        </p:txBody>
-      </p:sp>
-      <p:sp>
-        <p:nvSpPr>
-          <p:cNvPr id="3" name="Content Placeholder 2"/>
-          <p:cNvSpPr>
-            <a:spLocks noGrp="1"/>
-          </p:cNvSpPr>
-          <p:nvPr>
-            <p:ph idx="1"/>
-          </p:nvPr>
-        </p:nvSpPr>
-        <p:spPr/>
-        <p:txBody>
-          <a:bodyPr/>
-          <a:lstStyle/>
-          <a:p/>
-        </p:txBody>
-      </p:sp>
-      <p:pic>
-        <p:nvPicPr>
-          <p:cNvPr id="4" name="MarkdownSlidesImage" descr="showcase-local.png"/>
-          <p:cNvPicPr>
-            <a:picLocks noChangeAspect="1"/>
-          </p:cNvPicPr>
-          <p:nvPr/>
-        </p:nvPicPr>
-        <p:blipFill>
-          <a:blip r:embed="rId2"/>
-          <a:stretch>
-            <a:fillRect/>
-          </a:stretch>
-        </p:blipFill>
-        <p:spPr>
-          <a:xfrm>
-            <a:off x="2228144" y="1825625"/>
-            <a:ext cx="7735712" cy="4351338"/>
-          </a:xfrm>
-          <a:prstGeom prst="rect">
-            <a:avLst/>
-          </a:prstGeom>
-        </p:spPr>
-      </p:pic>
-    </p:spTree>
-  </p:cSld>
-  <p:clrMapOvr>
-    <a:masterClrMapping/>
-  </p:clrMapOvr>
-</p:sld>
-</file>
-
-<file path=ppt/slides/slide9.xml><?xml version="1.0" encoding="utf-8"?>
+<file path=ppt/slides/slide21.xml><?xml version="1.0" encoding="utf-8"?>
 <p:sld xmlns:a="http://schemas.openxmlformats.org/drawingml/2006/main" xmlns:p="http://schemas.openxmlformats.org/presentationml/2006/main" xmlns:r="http://schemas.openxmlformats.org/officeDocument/2006/relationships">
   <p:cSld>
     <p:spTree>
@@ -6916,7 +5516,7 @@
       <p:grpSpPr/>
       <p:pic>
         <p:nvPicPr>
-          <p:cNvPr id="3" name="MarkdownSlidesBackgroundImage" descr="showcase-local.png"/>
+          <p:cNvPr id="4" name="MarkdownSlidesBackgroundImage" descr="showcase-local.png"/>
           <p:cNvPicPr>
             <a:picLocks noChangeAspect="1"/>
           </p:cNvPicPr>
@@ -6958,17 +5558,1691 @@
             <a:pPr>
               <a:defRPr>
                 <a:solidFill>
-                  <a:schemeClr val="dk1"/>
+                  <a:schemeClr val="accent6"/>
                 </a:solidFill>
               </a:defRPr>
             </a:pPr>
             <a:r>
               <a:rPr>
                 <a:solidFill>
-                  <a:schemeClr val="dk1"/>
-                </a:solidFill>
-              </a:rPr>
-              <a:t>Background image via slide front matter</a:t>
+                  <a:schemeClr val="accent6"/>
+                </a:solidFill>
+              </a:rPr>
+              <a:t>Background image</a:t>
+            </a:r>
+            <a:endParaRPr>
+              <a:solidFill>
+                <a:schemeClr val="accent6"/>
+              </a:solidFill>
+            </a:endParaRPr>
+          </a:p>
+        </p:txBody>
+      </p:sp>
+      <p:sp>
+        <p:nvSpPr>
+          <p:cNvPr id="3" name="Content Placeholder 2"/>
+          <p:cNvSpPr>
+            <a:spLocks noGrp="1"/>
+          </p:cNvSpPr>
+          <p:nvPr>
+            <p:ph idx="1"/>
+          </p:nvPr>
+        </p:nvSpPr>
+        <p:spPr/>
+        <p:txBody>
+          <a:bodyPr wrap="square">
+            <a:normAutofit/>
+          </a:bodyPr>
+          <a:lstStyle/>
+          <a:p>
+            <a:pPr marL="0" indent="0">
+              <a:lnSpc>
+                <a:spcPct val="100000"/>
+              </a:lnSpc>
+              <a:spcBef>
+                <a:spcPts val="1200"/>
+              </a:spcBef>
+              <a:spcAft>
+                <a:spcPts val="600"/>
+              </a:spcAft>
+              <a:buNone/>
+              <a:defRPr>
+                <a:solidFill>
+                  <a:schemeClr val="dk1"/>
+                </a:solidFill>
+              </a:defRPr>
+            </a:pPr>
+            <a:r>
+              <a:rPr b="0" i="0">
+                <a:latin typeface="+mn-lt"/>
+                <a:ea typeface="+mn-ea"/>
+                <a:cs typeface="+mn-cs"/>
+                <a:solidFill>
+                  <a:schemeClr val="dk1"/>
+                </a:solidFill>
+              </a:rPr>
+              <a:t>This slide uses a slide background image.</a:t>
+            </a:r>
+            <a:endParaRPr>
+              <a:solidFill>
+                <a:schemeClr val="dk1"/>
+              </a:solidFill>
+            </a:endParaRPr>
+          </a:p>
+        </p:txBody>
+      </p:sp>
+    </p:spTree>
+  </p:cSld>
+  <p:clrMapOvr>
+    <a:masterClrMapping/>
+  </p:clrMapOvr>
+</p:sld>
+</file>
+
+<file path=ppt/slides/slide22.xml><?xml version="1.0" encoding="utf-8"?>
+<p:sld xmlns:a="http://schemas.openxmlformats.org/drawingml/2006/main" xmlns:p="http://schemas.openxmlformats.org/presentationml/2006/main" xmlns:r="http://schemas.openxmlformats.org/officeDocument/2006/relationships">
+  <p:cSld>
+    <p:bg>
+      <p:bgPr>
+        <a:gradFill rotWithShape="1">
+          <a:gsLst>
+            <a:gs pos="0">
+              <a:schemeClr val="accent2"/>
+            </a:gs>
+            <a:gs pos="100000">
+              <a:schemeClr val="accent4"/>
+            </a:gs>
+          </a:gsLst>
+          <a:lin ang="16200000" scaled="0"/>
+        </a:gradFill>
+        <a:effectLst/>
+      </p:bgPr>
+    </p:bg>
+    <p:spTree>
+      <p:nvGrpSpPr>
+        <p:cNvPr id="1" name=""/>
+        <p:cNvGrpSpPr/>
+        <p:nvPr/>
+      </p:nvGrpSpPr>
+      <p:grpSpPr/>
+      <p:sp>
+        <p:nvSpPr>
+          <p:cNvPr id="2" name="Title 1"/>
+          <p:cNvSpPr>
+            <a:spLocks noGrp="1"/>
+          </p:cNvSpPr>
+          <p:nvPr>
+            <p:ph type="title"/>
+          </p:nvPr>
+        </p:nvSpPr>
+        <p:spPr/>
+        <p:txBody>
+          <a:bodyPr>
+            <a:normAutofit/>
+          </a:bodyPr>
+          <a:lstStyle/>
+          <a:p>
+            <a:pPr>
+              <a:defRPr>
+                <a:solidFill>
+                  <a:schemeClr val="accent6"/>
+                </a:solidFill>
+              </a:defRPr>
+            </a:pPr>
+            <a:r>
+              <a:rPr>
+                <a:solidFill>
+                  <a:schemeClr val="accent6"/>
+                </a:solidFill>
+              </a:rPr>
+              <a:t>Linear gradient background</a:t>
+            </a:r>
+            <a:endParaRPr>
+              <a:solidFill>
+                <a:schemeClr val="accent6"/>
+              </a:solidFill>
+            </a:endParaRPr>
+          </a:p>
+        </p:txBody>
+      </p:sp>
+      <p:sp>
+        <p:nvSpPr>
+          <p:cNvPr id="3" name="Content Placeholder 2"/>
+          <p:cNvSpPr>
+            <a:spLocks noGrp="1"/>
+          </p:cNvSpPr>
+          <p:nvPr>
+            <p:ph idx="1"/>
+          </p:nvPr>
+        </p:nvSpPr>
+        <p:spPr/>
+        <p:txBody>
+          <a:bodyPr wrap="square">
+            <a:normAutofit/>
+          </a:bodyPr>
+          <a:lstStyle/>
+          <a:p>
+            <a:pPr marL="0" indent="0">
+              <a:lnSpc>
+                <a:spcPct val="100000"/>
+              </a:lnSpc>
+              <a:spcBef>
+                <a:spcPts val="1200"/>
+              </a:spcBef>
+              <a:spcAft>
+                <a:spcPts val="600"/>
+              </a:spcAft>
+              <a:buNone/>
+              <a:defRPr>
+                <a:solidFill>
+                  <a:schemeClr val="dk1"/>
+                </a:solidFill>
+              </a:defRPr>
+            </a:pPr>
+            <a:r>
+              <a:rPr b="0" i="0">
+                <a:latin typeface="+mn-lt"/>
+                <a:ea typeface="+mn-ea"/>
+                <a:cs typeface="+mn-cs"/>
+                <a:solidFill>
+                  <a:schemeClr val="dk1"/>
+                </a:solidFill>
+              </a:rPr>
+              <a:t>This slide uses a linear gradient background.</a:t>
+            </a:r>
+            <a:endParaRPr>
+              <a:solidFill>
+                <a:schemeClr val="dk1"/>
+              </a:solidFill>
+            </a:endParaRPr>
+          </a:p>
+        </p:txBody>
+      </p:sp>
+    </p:spTree>
+  </p:cSld>
+  <p:clrMapOvr>
+    <a:masterClrMapping/>
+  </p:clrMapOvr>
+</p:sld>
+</file>
+
+<file path=ppt/slides/slide23.xml><?xml version="1.0" encoding="utf-8"?>
+<p:sld xmlns:a="http://schemas.openxmlformats.org/drawingml/2006/main" xmlns:p="http://schemas.openxmlformats.org/presentationml/2006/main" xmlns:r="http://schemas.openxmlformats.org/officeDocument/2006/relationships">
+  <p:cSld>
+    <p:bg>
+      <p:bgPr>
+        <a:gradFill rotWithShape="1">
+          <a:gsLst>
+            <a:gs pos="0">
+              <a:schemeClr val="accent2"/>
+            </a:gs>
+            <a:gs pos="57999">
+              <a:schemeClr val="accent4"/>
+            </a:gs>
+            <a:gs pos="100000">
+              <a:schemeClr val="lt1"/>
+            </a:gs>
+          </a:gsLst>
+          <a:path path="circle">
+            <a:fillToRect l="50000" t="50000" r="50000" b="50000"/>
+          </a:path>
+        </a:gradFill>
+        <a:effectLst/>
+      </p:bgPr>
+    </p:bg>
+    <p:spTree>
+      <p:nvGrpSpPr>
+        <p:cNvPr id="1" name=""/>
+        <p:cNvGrpSpPr/>
+        <p:nvPr/>
+      </p:nvGrpSpPr>
+      <p:grpSpPr/>
+      <p:sp>
+        <p:nvSpPr>
+          <p:cNvPr id="2" name="Title 1"/>
+          <p:cNvSpPr>
+            <a:spLocks noGrp="1"/>
+          </p:cNvSpPr>
+          <p:nvPr>
+            <p:ph type="title"/>
+          </p:nvPr>
+        </p:nvSpPr>
+        <p:spPr/>
+        <p:txBody>
+          <a:bodyPr>
+            <a:normAutofit/>
+          </a:bodyPr>
+          <a:lstStyle/>
+          <a:p>
+            <a:pPr>
+              <a:defRPr>
+                <a:solidFill>
+                  <a:schemeClr val="accent6"/>
+                </a:solidFill>
+              </a:defRPr>
+            </a:pPr>
+            <a:r>
+              <a:rPr>
+                <a:solidFill>
+                  <a:schemeClr val="accent6"/>
+                </a:solidFill>
+              </a:rPr>
+              <a:t>Radial gradient background</a:t>
+            </a:r>
+            <a:endParaRPr>
+              <a:solidFill>
+                <a:schemeClr val="accent6"/>
+              </a:solidFill>
+            </a:endParaRPr>
+          </a:p>
+        </p:txBody>
+      </p:sp>
+      <p:sp>
+        <p:nvSpPr>
+          <p:cNvPr id="3" name="Content Placeholder 2"/>
+          <p:cNvSpPr>
+            <a:spLocks noGrp="1"/>
+          </p:cNvSpPr>
+          <p:nvPr>
+            <p:ph idx="1"/>
+          </p:nvPr>
+        </p:nvSpPr>
+        <p:spPr/>
+        <p:txBody>
+          <a:bodyPr wrap="square">
+            <a:normAutofit/>
+          </a:bodyPr>
+          <a:lstStyle/>
+          <a:p>
+            <a:pPr marL="0" indent="0">
+              <a:lnSpc>
+                <a:spcPct val="100000"/>
+              </a:lnSpc>
+              <a:spcBef>
+                <a:spcPts val="1200"/>
+              </a:spcBef>
+              <a:spcAft>
+                <a:spcPts val="600"/>
+              </a:spcAft>
+              <a:buNone/>
+              <a:defRPr>
+                <a:solidFill>
+                  <a:schemeClr val="dk1"/>
+                </a:solidFill>
+              </a:defRPr>
+            </a:pPr>
+            <a:r>
+              <a:rPr b="0" i="0">
+                <a:latin typeface="+mn-lt"/>
+                <a:ea typeface="+mn-ea"/>
+                <a:cs typeface="+mn-cs"/>
+                <a:solidFill>
+                  <a:schemeClr val="dk1"/>
+                </a:solidFill>
+              </a:rPr>
+              <a:t>This slide uses a radial gradient background.</a:t>
+            </a:r>
+            <a:endParaRPr>
+              <a:solidFill>
+                <a:schemeClr val="dk1"/>
+              </a:solidFill>
+            </a:endParaRPr>
+          </a:p>
+        </p:txBody>
+      </p:sp>
+    </p:spTree>
+  </p:cSld>
+  <p:clrMapOvr>
+    <a:masterClrMapping/>
+  </p:clrMapOvr>
+</p:sld>
+</file>
+
+<file path=ppt/slides/slide24.xml><?xml version="1.0" encoding="utf-8"?>
+<p:sld xmlns:a="http://schemas.openxmlformats.org/drawingml/2006/main" xmlns:p="http://schemas.openxmlformats.org/presentationml/2006/main" xmlns:r="http://schemas.openxmlformats.org/officeDocument/2006/relationships">
+  <p:cSld>
+    <p:bg>
+      <p:bgPr>
+        <a:gradFill rotWithShape="1">
+          <a:gsLst>
+            <a:gs pos="0">
+              <a:schemeClr val="accent1"/>
+            </a:gs>
+            <a:gs pos="100000">
+              <a:schemeClr val="accent4"/>
+            </a:gs>
+          </a:gsLst>
+          <a:lin ang="16200000" scaled="0"/>
+        </a:gradFill>
+        <a:effectLst/>
+      </p:bgPr>
+    </p:bg>
+    <p:spTree>
+      <p:nvGrpSpPr>
+        <p:cNvPr id="1" name=""/>
+        <p:cNvGrpSpPr/>
+        <p:nvPr/>
+      </p:nvGrpSpPr>
+      <p:grpSpPr/>
+      <p:sp>
+        <p:nvSpPr>
+          <p:cNvPr id="2" name="Title 1"/>
+          <p:cNvSpPr>
+            <a:spLocks noGrp="1"/>
+          </p:cNvSpPr>
+          <p:nvPr>
+            <p:ph type="title"/>
+          </p:nvPr>
+        </p:nvSpPr>
+        <p:spPr/>
+        <p:txBody>
+          <a:bodyPr>
+            <a:normAutofit/>
+          </a:bodyPr>
+          <a:lstStyle/>
+          <a:p>
+            <a:pPr>
+              <a:defRPr>
+                <a:solidFill>
+                  <a:schemeClr val="lt1"/>
+                </a:solidFill>
+              </a:defRPr>
+            </a:pPr>
+            <a:r>
+              <a:rPr>
+                <a:solidFill>
+                  <a:schemeClr val="lt1"/>
+                </a:solidFill>
+              </a:rPr>
+              <a:t>Slide colors override document colors</a:t>
+            </a:r>
+            <a:endParaRPr>
+              <a:solidFill>
+                <a:schemeClr val="lt1"/>
+              </a:solidFill>
+            </a:endParaRPr>
+          </a:p>
+        </p:txBody>
+      </p:sp>
+      <p:sp>
+        <p:nvSpPr>
+          <p:cNvPr id="3" name="Content Placeholder 2"/>
+          <p:cNvSpPr>
+            <a:spLocks noGrp="1"/>
+          </p:cNvSpPr>
+          <p:nvPr>
+            <p:ph idx="1"/>
+          </p:nvPr>
+        </p:nvSpPr>
+        <p:spPr/>
+        <p:txBody>
+          <a:bodyPr wrap="square">
+            <a:normAutofit/>
+          </a:bodyPr>
+          <a:lstStyle/>
+          <a:p>
+            <a:pPr marL="0" indent="0">
+              <a:lnSpc>
+                <a:spcPct val="100000"/>
+              </a:lnSpc>
+              <a:spcBef>
+                <a:spcPts val="1200"/>
+              </a:spcBef>
+              <a:spcAft>
+                <a:spcPts val="600"/>
+              </a:spcAft>
+              <a:buNone/>
+              <a:defRPr>
+                <a:solidFill>
+                  <a:schemeClr val="lt1"/>
+                </a:solidFill>
+              </a:defRPr>
+            </a:pPr>
+            <a:r>
+              <a:rPr b="0" i="0">
+                <a:latin typeface="+mn-lt"/>
+                <a:ea typeface="+mn-ea"/>
+                <a:cs typeface="+mn-cs"/>
+                <a:solidFill>
+                  <a:schemeClr val="lt1"/>
+                </a:solidFill>
+              </a:rPr>
+              <a:t>This slide overrides the document-level title and body colors.</a:t>
+            </a:r>
+            <a:endParaRPr>
+              <a:solidFill>
+                <a:schemeClr val="lt1"/>
+              </a:solidFill>
+            </a:endParaRPr>
+          </a:p>
+        </p:txBody>
+      </p:sp>
+    </p:spTree>
+  </p:cSld>
+  <p:clrMapOvr>
+    <a:masterClrMapping/>
+  </p:clrMapOvr>
+</p:sld>
+</file>
+
+<file path=ppt/slides/slide25.xml><?xml version="1.0" encoding="utf-8"?>
+<p:sld xmlns:a="http://schemas.openxmlformats.org/drawingml/2006/main" xmlns:p="http://schemas.openxmlformats.org/presentationml/2006/main" xmlns:r="http://schemas.openxmlformats.org/officeDocument/2006/relationships">
+  <p:cSld>
+    <p:spTree>
+      <p:nvGrpSpPr>
+        <p:cNvPr id="1" name=""/>
+        <p:cNvGrpSpPr/>
+        <p:nvPr/>
+      </p:nvGrpSpPr>
+      <p:grpSpPr/>
+    </p:spTree>
+  </p:cSld>
+  <p:clrMapOvr>
+    <a:masterClrMapping/>
+  </p:clrMapOvr>
+</p:sld>
+</file>
+
+<file path=ppt/slides/slide3.xml><?xml version="1.0" encoding="utf-8"?>
+<p:sld xmlns:a="http://schemas.openxmlformats.org/drawingml/2006/main" xmlns:p="http://schemas.openxmlformats.org/presentationml/2006/main" xmlns:r="http://schemas.openxmlformats.org/officeDocument/2006/relationships">
+  <p:cSld>
+    <p:spTree>
+      <p:nvGrpSpPr>
+        <p:cNvPr id="1" name=""/>
+        <p:cNvGrpSpPr/>
+        <p:nvPr/>
+      </p:nvGrpSpPr>
+      <p:grpSpPr/>
+      <p:sp>
+        <p:nvSpPr>
+          <p:cNvPr id="2" name="Title 1"/>
+          <p:cNvSpPr>
+            <a:spLocks noGrp="1"/>
+          </p:cNvSpPr>
+          <p:nvPr>
+            <p:ph type="title"/>
+          </p:nvPr>
+        </p:nvSpPr>
+        <p:spPr/>
+        <p:txBody>
+          <a:bodyPr>
+            <a:normAutofit/>
+          </a:bodyPr>
+          <a:lstStyle/>
+          <a:p>
+            <a:pPr>
+              <a:defRPr>
+                <a:solidFill>
+                  <a:schemeClr val="accent6"/>
+                </a:solidFill>
+              </a:defRPr>
+            </a:pPr>
+            <a:r>
+              <a:rPr>
+                <a:solidFill>
+                  <a:schemeClr val="accent6"/>
+                </a:solidFill>
+              </a:rPr>
+              <a:t>How the format works</a:t>
+            </a:r>
+            <a:endParaRPr>
+              <a:solidFill>
+                <a:schemeClr val="accent6"/>
+              </a:solidFill>
+            </a:endParaRPr>
+          </a:p>
+        </p:txBody>
+      </p:sp>
+      <p:sp>
+        <p:nvSpPr>
+          <p:cNvPr id="3" name="Content Placeholder 2"/>
+          <p:cNvSpPr>
+            <a:spLocks noGrp="1"/>
+          </p:cNvSpPr>
+          <p:nvPr>
+            <p:ph idx="1"/>
+          </p:nvPr>
+        </p:nvSpPr>
+        <p:spPr/>
+        <p:txBody>
+          <a:bodyPr wrap="square">
+            <a:normAutofit/>
+          </a:bodyPr>
+          <a:lstStyle/>
+          <a:p>
+            <a:pPr marL="0" indent="0">
+              <a:lnSpc>
+                <a:spcPct val="100000"/>
+              </a:lnSpc>
+              <a:spcBef>
+                <a:spcPts val="1200"/>
+              </a:spcBef>
+              <a:spcAft>
+                <a:spcPts val="600"/>
+              </a:spcAft>
+              <a:buNone/>
+              <a:defRPr>
+                <a:solidFill>
+                  <a:schemeClr val="dk1"/>
+                </a:solidFill>
+              </a:defRPr>
+            </a:pPr>
+            <a:r>
+              <a:rPr b="0" i="0">
+                <a:latin typeface="+mn-lt"/>
+                <a:ea typeface="+mn-ea"/>
+                <a:cs typeface="+mn-cs"/>
+                <a:solidFill>
+                  <a:schemeClr val="dk1"/>
+                </a:solidFill>
+              </a:rPr>
+              <a:t>An optional document front matter block sets deck-wide defaults such as aspect ratio, fonts, colors, and background behavior.</a:t>
+            </a:r>
+            <a:endParaRPr>
+              <a:solidFill>
+                <a:schemeClr val="dk1"/>
+              </a:solidFill>
+            </a:endParaRPr>
+          </a:p>
+          <a:p>
+            <a:pPr marL="0" indent="0">
+              <a:lnSpc>
+                <a:spcPct val="100000"/>
+              </a:lnSpc>
+              <a:spcBef>
+                <a:spcPts val="1200"/>
+              </a:spcBef>
+              <a:spcAft>
+                <a:spcPts val="600"/>
+              </a:spcAft>
+              <a:buNone/>
+              <a:defRPr>
+                <a:solidFill>
+                  <a:schemeClr val="dk1"/>
+                </a:solidFill>
+              </a:defRPr>
+            </a:pPr>
+            <a:r>
+              <a:rPr b="0" i="0">
+                <a:latin typeface="+mn-lt"/>
+                <a:ea typeface="+mn-ea"/>
+                <a:cs typeface="+mn-cs"/>
+                <a:solidFill>
+                  <a:schemeClr val="dk1"/>
+                </a:solidFill>
+              </a:rPr>
+              <a:t>Each </a:t>
+            </a:r>
+            <a:r>
+              <a:rPr b="0" i="0">
+                <a:latin typeface="Consolas"/>
+                <a:solidFill>
+                  <a:schemeClr val="dk1"/>
+                </a:solidFill>
+              </a:rPr>
+              <a:t># H1</a:t>
+            </a:r>
+            <a:r>
+              <a:rPr b="0" i="0">
+                <a:latin typeface="+mn-lt"/>
+                <a:ea typeface="+mn-ea"/>
+                <a:cs typeface="+mn-cs"/>
+                <a:solidFill>
+                  <a:schemeClr val="dk1"/>
+                </a:solidFill>
+              </a:rPr>
+              <a:t> starts a new slide, optional slide front matter appears immediately after the H1, and everything until the next H1 becomes that slide's content.</a:t>
+            </a:r>
+            <a:endParaRPr>
+              <a:solidFill>
+                <a:schemeClr val="dk1"/>
+              </a:solidFill>
+            </a:endParaRPr>
+          </a:p>
+        </p:txBody>
+      </p:sp>
+    </p:spTree>
+  </p:cSld>
+  <p:clrMapOvr>
+    <a:masterClrMapping/>
+  </p:clrMapOvr>
+</p:sld>
+</file>
+
+<file path=ppt/slides/slide4.xml><?xml version="1.0" encoding="utf-8"?>
+<p:sld xmlns:a="http://schemas.openxmlformats.org/drawingml/2006/main" xmlns:p="http://schemas.openxmlformats.org/presentationml/2006/main" xmlns:r="http://schemas.openxmlformats.org/officeDocument/2006/relationships">
+  <p:cSld>
+    <p:spTree>
+      <p:nvGrpSpPr>
+        <p:cNvPr id="1" name=""/>
+        <p:cNvGrpSpPr/>
+        <p:nvPr/>
+      </p:nvGrpSpPr>
+      <p:grpSpPr/>
+      <p:sp>
+        <p:nvSpPr>
+          <p:cNvPr id="2" name="Title 1"/>
+          <p:cNvSpPr>
+            <a:spLocks noGrp="1"/>
+          </p:cNvSpPr>
+          <p:nvPr>
+            <p:ph type="title"/>
+          </p:nvPr>
+        </p:nvSpPr>
+        <p:spPr/>
+        <p:txBody>
+          <a:bodyPr>
+            <a:normAutofit/>
+          </a:bodyPr>
+          <a:lstStyle/>
+          <a:p>
+            <a:pPr>
+              <a:defRPr>
+                <a:solidFill>
+                  <a:schemeClr val="accent6"/>
+                </a:solidFill>
+              </a:defRPr>
+            </a:pPr>
+            <a:r>
+              <a:rPr>
+                <a:solidFill>
+                  <a:schemeClr val="accent6"/>
+                </a:solidFill>
+              </a:rPr>
+              <a:t>Basic CLI usage</a:t>
+            </a:r>
+            <a:endParaRPr>
+              <a:solidFill>
+                <a:schemeClr val="accent6"/>
+              </a:solidFill>
+            </a:endParaRPr>
+          </a:p>
+        </p:txBody>
+      </p:sp>
+      <p:sp>
+        <p:nvSpPr>
+          <p:cNvPr id="3" name="Content Placeholder 2"/>
+          <p:cNvSpPr>
+            <a:spLocks noGrp="1"/>
+          </p:cNvSpPr>
+          <p:nvPr>
+            <p:ph idx="1"/>
+          </p:nvPr>
+        </p:nvSpPr>
+        <p:spPr/>
+        <p:txBody>
+          <a:bodyPr wrap="square">
+            <a:normAutofit/>
+          </a:bodyPr>
+          <a:lstStyle/>
+          <a:p>
+            <a:pPr marL="0" indent="0">
+              <a:lnSpc>
+                <a:spcPct val="100000"/>
+              </a:lnSpc>
+              <a:spcBef>
+                <a:spcPts val="1200"/>
+              </a:spcBef>
+              <a:spcAft>
+                <a:spcPts val="600"/>
+              </a:spcAft>
+              <a:buNone/>
+              <a:defRPr>
+                <a:solidFill>
+                  <a:schemeClr val="dk1"/>
+                </a:solidFill>
+              </a:defRPr>
+            </a:pPr>
+            <a:r>
+              <a:rPr b="0" i="0">
+                <a:latin typeface="+mn-lt"/>
+                <a:ea typeface="+mn-ea"/>
+                <a:cs typeface="+mn-cs"/>
+                <a:solidFill>
+                  <a:schemeClr val="dk1"/>
+                </a:solidFill>
+              </a:rPr>
+              <a:t>Run </a:t>
+            </a:r>
+            <a:r>
+              <a:rPr b="0" i="0">
+                <a:latin typeface="Consolas"/>
+                <a:solidFill>
+                  <a:schemeClr val="dk1"/>
+                </a:solidFill>
+              </a:rPr>
+              <a:t>md-to-pptx deck.md</a:t>
+            </a:r>
+            <a:r>
+              <a:rPr b="0" i="0">
+                <a:latin typeface="+mn-lt"/>
+                <a:ea typeface="+mn-ea"/>
+                <a:cs typeface="+mn-cs"/>
+                <a:solidFill>
+                  <a:schemeClr val="dk1"/>
+                </a:solidFill>
+              </a:rPr>
+              <a:t> to write </a:t>
+            </a:r>
+            <a:r>
+              <a:rPr b="0" i="0">
+                <a:latin typeface="Consolas"/>
+                <a:solidFill>
+                  <a:schemeClr val="dk1"/>
+                </a:solidFill>
+              </a:rPr>
+              <a:t>deck.pptx</a:t>
+            </a:r>
+            <a:r>
+              <a:rPr b="0" i="0">
+                <a:latin typeface="+mn-lt"/>
+                <a:ea typeface="+mn-ea"/>
+                <a:cs typeface="+mn-cs"/>
+                <a:solidFill>
+                  <a:schemeClr val="dk1"/>
+                </a:solidFill>
+              </a:rPr>
+              <a:t> next to the source markdown file.</a:t>
+            </a:r>
+            <a:endParaRPr>
+              <a:solidFill>
+                <a:schemeClr val="dk1"/>
+              </a:solidFill>
+            </a:endParaRPr>
+          </a:p>
+          <a:p>
+            <a:pPr marL="0" indent="0">
+              <a:lnSpc>
+                <a:spcPct val="100000"/>
+              </a:lnSpc>
+              <a:spcBef>
+                <a:spcPts val="1200"/>
+              </a:spcBef>
+              <a:spcAft>
+                <a:spcPts val="600"/>
+              </a:spcAft>
+              <a:buNone/>
+              <a:defRPr>
+                <a:solidFill>
+                  <a:schemeClr val="dk1"/>
+                </a:solidFill>
+              </a:defRPr>
+            </a:pPr>
+            <a:r>
+              <a:rPr b="0" i="0">
+                <a:latin typeface="+mn-lt"/>
+                <a:ea typeface="+mn-ea"/>
+                <a:cs typeface="+mn-cs"/>
+                <a:solidFill>
+                  <a:schemeClr val="dk1"/>
+                </a:solidFill>
+              </a:rPr>
+              <a:t>Use </a:t>
+            </a:r>
+            <a:r>
+              <a:rPr b="0" i="0">
+                <a:latin typeface="Consolas"/>
+                <a:solidFill>
+                  <a:schemeClr val="dk1"/>
+                </a:solidFill>
+              </a:rPr>
+              <a:t>md-to-pptx deck.md out.pptx</a:t>
+            </a:r>
+            <a:r>
+              <a:rPr b="0" i="0">
+                <a:latin typeface="+mn-lt"/>
+                <a:ea typeface="+mn-ea"/>
+                <a:cs typeface="+mn-cs"/>
+                <a:solidFill>
+                  <a:schemeClr val="dk1"/>
+                </a:solidFill>
+              </a:rPr>
+              <a:t> to choose the output path, </a:t>
+            </a:r>
+            <a:r>
+              <a:rPr b="0" i="0">
+                <a:latin typeface="Consolas"/>
+                <a:solidFill>
+                  <a:schemeClr val="dk1"/>
+                </a:solidFill>
+              </a:rPr>
+              <a:t>--template theme.pptx</a:t>
+            </a:r>
+            <a:r>
+              <a:rPr b="0" i="0">
+                <a:latin typeface="+mn-lt"/>
+                <a:ea typeface="+mn-ea"/>
+                <a:cs typeface="+mn-cs"/>
+                <a:solidFill>
+                  <a:schemeClr val="dk1"/>
+                </a:solidFill>
+              </a:rPr>
+              <a:t> to render against an existing PowerPoint template, and </a:t>
+            </a:r>
+            <a:r>
+              <a:rPr b="0" i="0">
+                <a:latin typeface="Consolas"/>
+                <a:solidFill>
+                  <a:schemeClr val="dk1"/>
+                </a:solidFill>
+              </a:rPr>
+              <a:t>--force</a:t>
+            </a:r>
+            <a:r>
+              <a:rPr b="0" i="0">
+                <a:latin typeface="+mn-lt"/>
+                <a:ea typeface="+mn-ea"/>
+                <a:cs typeface="+mn-cs"/>
+                <a:solidFill>
+                  <a:schemeClr val="dk1"/>
+                </a:solidFill>
+              </a:rPr>
+              <a:t> to overwrite an existing file.</a:t>
+            </a:r>
+            <a:endParaRPr>
+              <a:solidFill>
+                <a:schemeClr val="dk1"/>
+              </a:solidFill>
+            </a:endParaRPr>
+          </a:p>
+        </p:txBody>
+      </p:sp>
+    </p:spTree>
+  </p:cSld>
+  <p:clrMapOvr>
+    <a:masterClrMapping/>
+  </p:clrMapOvr>
+</p:sld>
+</file>
+
+<file path=ppt/slides/slide5.xml><?xml version="1.0" encoding="utf-8"?>
+<p:sld xmlns:a="http://schemas.openxmlformats.org/drawingml/2006/main" xmlns:p="http://schemas.openxmlformats.org/presentationml/2006/main" xmlns:r="http://schemas.openxmlformats.org/officeDocument/2006/relationships">
+  <p:cSld>
+    <p:spTree>
+      <p:nvGrpSpPr>
+        <p:cNvPr id="1" name=""/>
+        <p:cNvGrpSpPr/>
+        <p:nvPr/>
+      </p:nvGrpSpPr>
+      <p:grpSpPr/>
+      <p:sp>
+        <p:nvSpPr>
+          <p:cNvPr id="2" name="Title 1"/>
+          <p:cNvSpPr>
+            <a:spLocks noGrp="1"/>
+          </p:cNvSpPr>
+          <p:nvPr>
+            <p:ph type="title"/>
+          </p:nvPr>
+        </p:nvSpPr>
+        <p:spPr/>
+        <p:txBody>
+          <a:bodyPr>
+            <a:normAutofit/>
+          </a:bodyPr>
+          <a:lstStyle/>
+          <a:p>
+            <a:pPr>
+              <a:defRPr>
+                <a:solidFill>
+                  <a:schemeClr val="accent6"/>
+                </a:solidFill>
+              </a:defRPr>
+            </a:pPr>
+            <a:r>
+              <a:rPr>
+                <a:solidFill>
+                  <a:schemeClr val="accent6"/>
+                </a:solidFill>
+              </a:rPr>
+              <a:t>Inspection-friendly CLI modes</a:t>
+            </a:r>
+            <a:endParaRPr>
+              <a:solidFill>
+                <a:schemeClr val="accent6"/>
+              </a:solidFill>
+            </a:endParaRPr>
+          </a:p>
+        </p:txBody>
+      </p:sp>
+      <p:sp>
+        <p:nvSpPr>
+          <p:cNvPr id="3" name="Content Placeholder 2"/>
+          <p:cNvSpPr>
+            <a:spLocks noGrp="1"/>
+          </p:cNvSpPr>
+          <p:nvPr>
+            <p:ph idx="1"/>
+          </p:nvPr>
+        </p:nvSpPr>
+        <p:spPr/>
+        <p:txBody>
+          <a:bodyPr wrap="square">
+            <a:normAutofit/>
+          </a:bodyPr>
+          <a:lstStyle/>
+          <a:p>
+            <a:pPr marL="0" indent="0">
+              <a:lnSpc>
+                <a:spcPct val="100000"/>
+              </a:lnSpc>
+              <a:spcBef>
+                <a:spcPts val="1200"/>
+              </a:spcBef>
+              <a:spcAft>
+                <a:spcPts val="600"/>
+              </a:spcAft>
+              <a:buNone/>
+              <a:defRPr>
+                <a:solidFill>
+                  <a:schemeClr val="dk1"/>
+                </a:solidFill>
+              </a:defRPr>
+            </a:pPr>
+            <a:r>
+              <a:rPr b="0" i="0">
+                <a:latin typeface="+mn-lt"/>
+                <a:ea typeface="+mn-ea"/>
+                <a:cs typeface="+mn-cs"/>
+                <a:solidFill>
+                  <a:schemeClr val="dk1"/>
+                </a:solidFill>
+              </a:rPr>
+              <a:t>Use </a:t>
+            </a:r>
+            <a:r>
+              <a:rPr b="0" i="0">
+                <a:latin typeface="Consolas"/>
+                <a:solidFill>
+                  <a:schemeClr val="dk1"/>
+                </a:solidFill>
+              </a:rPr>
+              <a:t>--syntax</a:t>
+            </a:r>
+            <a:r>
+              <a:rPr b="0" i="0">
+                <a:latin typeface="+mn-lt"/>
+                <a:ea typeface="+mn-ea"/>
+                <a:cs typeface="+mn-cs"/>
+                <a:solidFill>
+                  <a:schemeClr val="dk1"/>
+                </a:solidFill>
+              </a:rPr>
+              <a:t> to print the supported deck format, </a:t>
+            </a:r>
+            <a:r>
+              <a:rPr b="0" i="0">
+                <a:latin typeface="Consolas"/>
+                <a:solidFill>
+                  <a:schemeClr val="dk1"/>
+                </a:solidFill>
+              </a:rPr>
+              <a:t>--list-layouts</a:t>
+            </a:r>
+            <a:r>
+              <a:rPr b="0" i="0">
+                <a:latin typeface="+mn-lt"/>
+                <a:ea typeface="+mn-ea"/>
+                <a:cs typeface="+mn-cs"/>
+                <a:solidFill>
+                  <a:schemeClr val="dk1"/>
+                </a:solidFill>
+              </a:rPr>
+              <a:t> to inspect the layouts available in a template, and </a:t>
+            </a:r>
+            <a:r>
+              <a:rPr b="0" i="0">
+                <a:latin typeface="Consolas"/>
+                <a:solidFill>
+                  <a:schemeClr val="dk1"/>
+                </a:solidFill>
+              </a:rPr>
+              <a:t>--list-color-schemes</a:t>
+            </a:r>
+            <a:r>
+              <a:rPr b="0" i="0">
+                <a:latin typeface="+mn-lt"/>
+                <a:ea typeface="+mn-ea"/>
+                <a:cs typeface="+mn-cs"/>
+                <a:solidFill>
+                  <a:schemeClr val="dk1"/>
+                </a:solidFill>
+              </a:rPr>
+              <a:t> to see the built-in theme presets.</a:t>
+            </a:r>
+            <a:endParaRPr>
+              <a:solidFill>
+                <a:schemeClr val="dk1"/>
+              </a:solidFill>
+            </a:endParaRPr>
+          </a:p>
+          <a:p>
+            <a:pPr marL="0" indent="0">
+              <a:lnSpc>
+                <a:spcPct val="100000"/>
+              </a:lnSpc>
+              <a:spcBef>
+                <a:spcPts val="1200"/>
+              </a:spcBef>
+              <a:spcAft>
+                <a:spcPts val="600"/>
+              </a:spcAft>
+              <a:buNone/>
+              <a:defRPr>
+                <a:solidFill>
+                  <a:schemeClr val="dk1"/>
+                </a:solidFill>
+              </a:defRPr>
+            </a:pPr>
+            <a:r>
+              <a:rPr b="0" i="0">
+                <a:latin typeface="+mn-lt"/>
+                <a:ea typeface="+mn-ea"/>
+                <a:cs typeface="+mn-cs"/>
+                <a:solidFill>
+                  <a:schemeClr val="dk1"/>
+                </a:solidFill>
+              </a:rPr>
+              <a:t>These modes are especially useful when a person or coding agent needs to discover the valid inputs before generating a deck.</a:t>
+            </a:r>
+            <a:endParaRPr>
+              <a:solidFill>
+                <a:schemeClr val="dk1"/>
+              </a:solidFill>
+            </a:endParaRPr>
+          </a:p>
+        </p:txBody>
+      </p:sp>
+    </p:spTree>
+  </p:cSld>
+  <p:clrMapOvr>
+    <a:masterClrMapping/>
+  </p:clrMapOvr>
+</p:sld>
+</file>
+
+<file path=ppt/slides/slide6.xml><?xml version="1.0" encoding="utf-8"?>
+<p:sld xmlns:a="http://schemas.openxmlformats.org/drawingml/2006/main" xmlns:p="http://schemas.openxmlformats.org/presentationml/2006/main" xmlns:r="http://schemas.openxmlformats.org/officeDocument/2006/relationships">
+  <p:cSld>
+    <p:spTree>
+      <p:nvGrpSpPr>
+        <p:cNvPr id="1" name=""/>
+        <p:cNvGrpSpPr/>
+        <p:nvPr/>
+      </p:nvGrpSpPr>
+      <p:grpSpPr/>
+      <p:sp>
+        <p:nvSpPr>
+          <p:cNvPr id="2" name="Title 1"/>
+          <p:cNvSpPr>
+            <a:spLocks noGrp="1"/>
+          </p:cNvSpPr>
+          <p:nvPr>
+            <p:ph type="title"/>
+          </p:nvPr>
+        </p:nvSpPr>
+        <p:spPr/>
+        <p:txBody>
+          <a:bodyPr>
+            <a:normAutofit/>
+          </a:bodyPr>
+          <a:lstStyle/>
+          <a:p>
+            <a:pPr>
+              <a:defRPr>
+                <a:solidFill>
+                  <a:schemeClr val="accent6"/>
+                </a:solidFill>
+              </a:defRPr>
+            </a:pPr>
+            <a:r>
+              <a:rPr>
+                <a:solidFill>
+                  <a:schemeClr val="accent6"/>
+                </a:solidFill>
+              </a:rPr>
+              <a:t>Color and template control</a:t>
+            </a:r>
+            <a:endParaRPr>
+              <a:solidFill>
+                <a:schemeClr val="accent6"/>
+              </a:solidFill>
+            </a:endParaRPr>
+          </a:p>
+        </p:txBody>
+      </p:sp>
+      <p:sp>
+        <p:nvSpPr>
+          <p:cNvPr id="3" name="Content Placeholder 2"/>
+          <p:cNvSpPr>
+            <a:spLocks noGrp="1"/>
+          </p:cNvSpPr>
+          <p:nvPr>
+            <p:ph idx="1"/>
+          </p:nvPr>
+        </p:nvSpPr>
+        <p:spPr/>
+        <p:txBody>
+          <a:bodyPr wrap="square">
+            <a:normAutofit/>
+          </a:bodyPr>
+          <a:lstStyle/>
+          <a:p>
+            <a:pPr marL="0" indent="0">
+              <a:lnSpc>
+                <a:spcPct val="100000"/>
+              </a:lnSpc>
+              <a:spcBef>
+                <a:spcPts val="1200"/>
+              </a:spcBef>
+              <a:spcAft>
+                <a:spcPts val="600"/>
+              </a:spcAft>
+              <a:buNone/>
+              <a:defRPr>
+                <a:solidFill>
+                  <a:schemeClr val="dk1"/>
+                </a:solidFill>
+              </a:defRPr>
+            </a:pPr>
+            <a:r>
+              <a:rPr b="0" i="0">
+                <a:latin typeface="+mn-lt"/>
+                <a:ea typeface="+mn-ea"/>
+                <a:cs typeface="+mn-cs"/>
+                <a:solidFill>
+                  <a:schemeClr val="dk1"/>
+                </a:solidFill>
+              </a:rPr>
+              <a:t>Markdown can set document-level and slide-level colors with </a:t>
+            </a:r>
+            <a:r>
+              <a:rPr b="0" i="0">
+                <a:latin typeface="Consolas"/>
+                <a:solidFill>
+                  <a:schemeClr val="dk1"/>
+                </a:solidFill>
+              </a:rPr>
+              <a:t>color_scheme</a:t>
+            </a:r>
+            <a:r>
+              <a:rPr b="0" i="0">
+                <a:latin typeface="+mn-lt"/>
+                <a:ea typeface="+mn-ea"/>
+                <a:cs typeface="+mn-cs"/>
+                <a:solidFill>
+                  <a:schemeClr val="dk1"/>
+                </a:solidFill>
+              </a:rPr>
+              <a:t>, </a:t>
+            </a:r>
+            <a:r>
+              <a:rPr b="0" i="0">
+                <a:latin typeface="Consolas"/>
+                <a:solidFill>
+                  <a:schemeClr val="dk1"/>
+                </a:solidFill>
+              </a:rPr>
+              <a:t>title_color</a:t>
+            </a:r>
+            <a:r>
+              <a:rPr b="0" i="0">
+                <a:latin typeface="+mn-lt"/>
+                <a:ea typeface="+mn-ea"/>
+                <a:cs typeface="+mn-cs"/>
+                <a:solidFill>
+                  <a:schemeClr val="dk1"/>
+                </a:solidFill>
+              </a:rPr>
+              <a:t>, </a:t>
+            </a:r>
+            <a:r>
+              <a:rPr b="0" i="0">
+                <a:latin typeface="Consolas"/>
+                <a:solidFill>
+                  <a:schemeClr val="dk1"/>
+                </a:solidFill>
+              </a:rPr>
+              <a:t>body_color</a:t>
+            </a:r>
+            <a:r>
+              <a:rPr b="0" i="0">
+                <a:latin typeface="+mn-lt"/>
+                <a:ea typeface="+mn-ea"/>
+                <a:cs typeface="+mn-cs"/>
+                <a:solidFill>
+                  <a:schemeClr val="dk1"/>
+                </a:solidFill>
+              </a:rPr>
+              <a:t>, and background values such as solid colors, gradients, and images.</a:t>
+            </a:r>
+            <a:endParaRPr>
+              <a:solidFill>
+                <a:schemeClr val="dk1"/>
+              </a:solidFill>
+            </a:endParaRPr>
+          </a:p>
+          <a:p>
+            <a:pPr marL="0" indent="0">
+              <a:lnSpc>
+                <a:spcPct val="100000"/>
+              </a:lnSpc>
+              <a:spcBef>
+                <a:spcPts val="1200"/>
+              </a:spcBef>
+              <a:spcAft>
+                <a:spcPts val="600"/>
+              </a:spcAft>
+              <a:buNone/>
+              <a:defRPr>
+                <a:solidFill>
+                  <a:schemeClr val="dk1"/>
+                </a:solidFill>
+              </a:defRPr>
+            </a:pPr>
+            <a:r>
+              <a:rPr b="0" i="0">
+                <a:latin typeface="+mn-lt"/>
+                <a:ea typeface="+mn-ea"/>
+                <a:cs typeface="+mn-cs"/>
+                <a:solidFill>
+                  <a:schemeClr val="dk1"/>
+                </a:solidFill>
+              </a:rPr>
+              <a:t>When a template already has the colors you want, </a:t>
+            </a:r>
+            <a:r>
+              <a:rPr b="0" i="0">
+                <a:latin typeface="Consolas"/>
+                <a:solidFill>
+                  <a:schemeClr val="dk1"/>
+                </a:solidFill>
+              </a:rPr>
+              <a:t>--ignore-document-colors</a:t>
+            </a:r>
+            <a:r>
+              <a:rPr b="0" i="0">
+                <a:latin typeface="+mn-lt"/>
+                <a:ea typeface="+mn-ea"/>
+                <a:cs typeface="+mn-cs"/>
+                <a:solidFill>
+                  <a:schemeClr val="dk1"/>
+                </a:solidFill>
+              </a:rPr>
+              <a:t> and </a:t>
+            </a:r>
+            <a:r>
+              <a:rPr b="0" i="0">
+                <a:latin typeface="Consolas"/>
+                <a:solidFill>
+                  <a:schemeClr val="dk1"/>
+                </a:solidFill>
+              </a:rPr>
+              <a:t>--ignore-slide-colors</a:t>
+            </a:r>
+            <a:r>
+              <a:rPr b="0" i="0">
+                <a:latin typeface="+mn-lt"/>
+                <a:ea typeface="+mn-ea"/>
+                <a:cs typeface="+mn-cs"/>
+                <a:solidFill>
+                  <a:schemeClr val="dk1"/>
+                </a:solidFill>
+              </a:rPr>
+              <a:t> let the template remain the source of truth for those color settings.</a:t>
+            </a:r>
+            <a:endParaRPr>
+              <a:solidFill>
+                <a:schemeClr val="dk1"/>
+              </a:solidFill>
+            </a:endParaRPr>
+          </a:p>
+        </p:txBody>
+      </p:sp>
+    </p:spTree>
+  </p:cSld>
+  <p:clrMapOvr>
+    <a:masterClrMapping/>
+  </p:clrMapOvr>
+</p:sld>
+</file>
+
+<file path=ppt/slides/slide7.xml><?xml version="1.0" encoding="utf-8"?>
+<p:sld xmlns:a="http://schemas.openxmlformats.org/drawingml/2006/main" xmlns:p="http://schemas.openxmlformats.org/presentationml/2006/main" xmlns:r="http://schemas.openxmlformats.org/officeDocument/2006/relationships">
+  <p:cSld>
+    <p:spTree>
+      <p:nvGrpSpPr>
+        <p:cNvPr id="1" name=""/>
+        <p:cNvGrpSpPr/>
+        <p:nvPr/>
+      </p:nvGrpSpPr>
+      <p:grpSpPr/>
+      <p:sp>
+        <p:nvSpPr>
+          <p:cNvPr id="2" name="Title 1"/>
+          <p:cNvSpPr>
+            <a:spLocks noGrp="1"/>
+          </p:cNvSpPr>
+          <p:nvPr>
+            <p:ph type="title"/>
+          </p:nvPr>
+        </p:nvSpPr>
+        <p:spPr/>
+        <p:txBody>
+          <a:bodyPr>
+            <a:normAutofit/>
+          </a:bodyPr>
+          <a:lstStyle/>
+          <a:p>
+            <a:pPr>
+              <a:defRPr>
+                <a:solidFill>
+                  <a:schemeClr val="accent6"/>
+                </a:solidFill>
+              </a:defRPr>
+            </a:pPr>
+            <a:r>
+              <a:rPr>
+                <a:solidFill>
+                  <a:schemeClr val="accent6"/>
+                </a:solidFill>
+              </a:rPr>
+              <a:t>Feature examples</a:t>
+            </a:r>
+            <a:endParaRPr>
+              <a:solidFill>
+                <a:schemeClr val="accent6"/>
+              </a:solidFill>
+            </a:endParaRPr>
+          </a:p>
+        </p:txBody>
+      </p:sp>
+      <p:sp>
+        <p:nvSpPr>
+          <p:cNvPr id="3" name="Text Placeholder 2"/>
+          <p:cNvSpPr>
+            <a:spLocks noGrp="1"/>
+          </p:cNvSpPr>
+          <p:nvPr>
+            <p:ph type="body" idx="1"/>
+          </p:nvPr>
+        </p:nvSpPr>
+        <p:spPr/>
+        <p:txBody>
+          <a:bodyPr wrap="square">
+            <a:normAutofit/>
+          </a:bodyPr>
+          <a:lstStyle/>
+          <a:p>
+            <a:pPr marL="0" indent="0">
+              <a:lnSpc>
+                <a:spcPct val="100000"/>
+              </a:lnSpc>
+              <a:spcBef>
+                <a:spcPts val="1200"/>
+              </a:spcBef>
+              <a:spcAft>
+                <a:spcPts val="600"/>
+              </a:spcAft>
+              <a:buNone/>
+              <a:defRPr>
+                <a:solidFill>
+                  <a:schemeClr val="dk1"/>
+                </a:solidFill>
+              </a:defRPr>
+            </a:pPr>
+            <a:r>
+              <a:rPr b="0" i="0">
+                <a:latin typeface="+mn-lt"/>
+                <a:ea typeface="+mn-ea"/>
+                <a:cs typeface="+mn-cs"/>
+                <a:solidFill>
+                  <a:schemeClr val="dk1"/>
+                </a:solidFill>
+              </a:rPr>
+              <a:t>Each slide after this one isolates a single </a:t>
+            </a:r>
+            <a:r>
+              <a:rPr b="0" i="0">
+                <a:latin typeface="Consolas"/>
+                <a:solidFill>
+                  <a:schemeClr val="dk1"/>
+                </a:solidFill>
+              </a:rPr>
+              <a:t>md-to-pptx</a:t>
+            </a:r>
+            <a:r>
+              <a:rPr b="0" i="0">
+                <a:latin typeface="+mn-lt"/>
+                <a:ea typeface="+mn-ea"/>
+                <a:cs typeface="+mn-cs"/>
+                <a:solidFill>
+                  <a:schemeClr val="dk1"/>
+                </a:solidFill>
+              </a:rPr>
+              <a:t> feature.</a:t>
+            </a:r>
+            <a:endParaRPr>
+              <a:solidFill>
+                <a:schemeClr val="dk1"/>
+              </a:solidFill>
+            </a:endParaRPr>
+          </a:p>
+        </p:txBody>
+      </p:sp>
+    </p:spTree>
+  </p:cSld>
+  <p:clrMapOvr>
+    <a:masterClrMapping/>
+  </p:clrMapOvr>
+</p:sld>
+</file>
+
+<file path=ppt/slides/slide8.xml><?xml version="1.0" encoding="utf-8"?>
+<p:sld xmlns:a="http://schemas.openxmlformats.org/drawingml/2006/main" xmlns:p="http://schemas.openxmlformats.org/presentationml/2006/main" xmlns:r="http://schemas.openxmlformats.org/officeDocument/2006/relationships">
+  <p:cSld>
+    <p:spTree>
+      <p:nvGrpSpPr>
+        <p:cNvPr id="1" name=""/>
+        <p:cNvGrpSpPr/>
+        <p:nvPr/>
+      </p:nvGrpSpPr>
+      <p:grpSpPr/>
+      <p:sp>
+        <p:nvSpPr>
+          <p:cNvPr id="2" name="Title 1"/>
+          <p:cNvSpPr>
+            <a:spLocks noGrp="1"/>
+          </p:cNvSpPr>
+          <p:nvPr>
+            <p:ph type="ctrTitle"/>
+          </p:nvPr>
+        </p:nvSpPr>
+        <p:spPr/>
+        <p:txBody>
+          <a:bodyPr>
+            <a:normAutofit/>
+          </a:bodyPr>
+          <a:lstStyle/>
+          <a:p>
+            <a:pPr>
+              <a:defRPr>
+                <a:solidFill>
+                  <a:schemeClr val="accent6"/>
+                </a:solidFill>
+              </a:defRPr>
+            </a:pPr>
+            <a:r>
+              <a:rPr>
+                <a:solidFill>
+                  <a:schemeClr val="accent6"/>
+                </a:solidFill>
+              </a:rPr>
+              <a:t>Title Slide layout</a:t>
+            </a:r>
+            <a:endParaRPr>
+              <a:solidFill>
+                <a:schemeClr val="accent6"/>
+              </a:solidFill>
+            </a:endParaRPr>
+          </a:p>
+        </p:txBody>
+      </p:sp>
+      <p:sp>
+        <p:nvSpPr>
+          <p:cNvPr id="3" name="Subtitle 2"/>
+          <p:cNvSpPr>
+            <a:spLocks noGrp="1"/>
+          </p:cNvSpPr>
+          <p:nvPr>
+            <p:ph type="subTitle" idx="1"/>
+          </p:nvPr>
+        </p:nvSpPr>
+        <p:spPr/>
+        <p:txBody>
+          <a:bodyPr wrap="square">
+            <a:normAutofit/>
+          </a:bodyPr>
+          <a:lstStyle/>
+          <a:p>
+            <a:pPr marL="0" indent="0">
+              <a:lnSpc>
+                <a:spcPct val="100000"/>
+              </a:lnSpc>
+              <a:spcBef>
+                <a:spcPts val="1200"/>
+              </a:spcBef>
+              <a:spcAft>
+                <a:spcPts val="600"/>
+              </a:spcAft>
+              <a:buNone/>
+              <a:defRPr>
+                <a:solidFill>
+                  <a:schemeClr val="dk1"/>
+                </a:solidFill>
+              </a:defRPr>
+            </a:pPr>
+            <a:r>
+              <a:rPr b="0" i="0">
+                <a:latin typeface="+mn-lt"/>
+                <a:ea typeface="+mn-ea"/>
+                <a:cs typeface="+mn-cs"/>
+                <a:solidFill>
+                  <a:schemeClr val="dk1"/>
+                </a:solidFill>
+              </a:rPr>
+              <a:t>This slide uses the Title Slide layout.</a:t>
+            </a:r>
+            <a:endParaRPr>
+              <a:solidFill>
+                <a:schemeClr val="dk1"/>
+              </a:solidFill>
+            </a:endParaRPr>
+          </a:p>
+        </p:txBody>
+      </p:sp>
+    </p:spTree>
+  </p:cSld>
+  <p:clrMapOvr>
+    <a:masterClrMapping/>
+  </p:clrMapOvr>
+</p:sld>
+</file>
+
+<file path=ppt/slides/slide9.xml><?xml version="1.0" encoding="utf-8"?>
+<p:sld xmlns:a="http://schemas.openxmlformats.org/drawingml/2006/main" xmlns:p="http://schemas.openxmlformats.org/presentationml/2006/main" xmlns:r="http://schemas.openxmlformats.org/officeDocument/2006/relationships">
+  <p:cSld>
+    <p:spTree>
+      <p:nvGrpSpPr>
+        <p:cNvPr id="1" name=""/>
+        <p:cNvGrpSpPr/>
+        <p:nvPr/>
+      </p:nvGrpSpPr>
+      <p:grpSpPr/>
+      <p:sp>
+        <p:nvSpPr>
+          <p:cNvPr id="2" name="Title 1"/>
+          <p:cNvSpPr>
+            <a:spLocks noGrp="1"/>
+          </p:cNvSpPr>
+          <p:nvPr>
+            <p:ph type="title"/>
+          </p:nvPr>
+        </p:nvSpPr>
+        <p:spPr/>
+        <p:txBody>
+          <a:bodyPr>
+            <a:normAutofit/>
+          </a:bodyPr>
+          <a:lstStyle/>
+          <a:p>
+            <a:pPr>
+              <a:defRPr>
+                <a:solidFill>
+                  <a:schemeClr val="accent6"/>
+                </a:solidFill>
+              </a:defRPr>
+            </a:pPr>
+            <a:r>
+              <a:rPr>
+                <a:solidFill>
+                  <a:schemeClr val="accent6"/>
+                </a:solidFill>
+              </a:rPr>
+              <a:t>Section Header layout</a:t>
+            </a:r>
+            <a:endParaRPr>
+              <a:solidFill>
+                <a:schemeClr val="accent6"/>
+              </a:solidFill>
+            </a:endParaRPr>
+          </a:p>
+        </p:txBody>
+      </p:sp>
+      <p:sp>
+        <p:nvSpPr>
+          <p:cNvPr id="3" name="Text Placeholder 2"/>
+          <p:cNvSpPr>
+            <a:spLocks noGrp="1"/>
+          </p:cNvSpPr>
+          <p:nvPr>
+            <p:ph type="body" idx="1"/>
+          </p:nvPr>
+        </p:nvSpPr>
+        <p:spPr/>
+        <p:txBody>
+          <a:bodyPr wrap="square">
+            <a:normAutofit/>
+          </a:bodyPr>
+          <a:lstStyle/>
+          <a:p>
+            <a:pPr marL="0" indent="0">
+              <a:lnSpc>
+                <a:spcPct val="100000"/>
+              </a:lnSpc>
+              <a:spcBef>
+                <a:spcPts val="1200"/>
+              </a:spcBef>
+              <a:spcAft>
+                <a:spcPts val="600"/>
+              </a:spcAft>
+              <a:buNone/>
+              <a:defRPr>
+                <a:solidFill>
+                  <a:schemeClr val="dk1"/>
+                </a:solidFill>
+              </a:defRPr>
+            </a:pPr>
+            <a:r>
+              <a:rPr b="0" i="0">
+                <a:latin typeface="+mn-lt"/>
+                <a:ea typeface="+mn-ea"/>
+                <a:cs typeface="+mn-cs"/>
+                <a:solidFill>
+                  <a:schemeClr val="dk1"/>
+                </a:solidFill>
+              </a:rPr>
+              <a:t>This slide uses the Section Header layout.</a:t>
             </a:r>
             <a:endParaRPr>
               <a:solidFill>
@@ -6989,42 +7263,42 @@
 <file path=ppt/theme/theme1.xml><?xml version="1.0" encoding="utf-8"?>
 <ns0:theme xmlns:ns0="http://schemas.openxmlformats.org/drawingml/2006/main" xmlns:ns1="http://schemas.microsoft.com/office/thememl/2012/main" name="Office Theme">
   <ns0:themeElements>
-    <ns0:clrScheme name="Office">
+    <ns0:clrScheme name="Custom">
       <ns0:dk1>
-        <ns0:sysClr val="windowText" lastClr="000000"/>
+        <ns0:sysClr val="windowText" lastClr="10263F"/>
       </ns0:dk1>
       <ns0:lt1>
-        <ns0:sysClr val="window" lastClr="FFFFFF"/>
+        <ns0:sysClr val="window" lastClr="F9F9F9"/>
       </ns0:lt1>
       <ns0:dk2>
-        <ns0:srgbClr val="0E2841"/>
+        <ns0:srgbClr val="355A78"/>
       </ns0:dk2>
       <ns0:lt2>
-        <ns0:srgbClr val="E8E8E8"/>
+        <ns0:srgbClr val="EEF8FF"/>
       </ns0:lt2>
       <ns0:accent1>
-        <ns0:srgbClr val="156082"/>
+        <ns0:srgbClr val="1D6FA8"/>
       </ns0:accent1>
       <ns0:accent2>
-        <ns0:srgbClr val="E97132"/>
+        <ns0:srgbClr val="5AA9E6"/>
       </ns0:accent2>
       <ns0:accent3>
-        <ns0:srgbClr val="196B24"/>
+        <ns0:srgbClr val="7FC8F8"/>
       </ns0:accent3>
       <ns0:accent4>
-        <ns0:srgbClr val="0F9ED5"/>
+        <ns0:srgbClr val="FFB347"/>
       </ns0:accent4>
       <ns0:accent5>
-        <ns0:srgbClr val="A02B93"/>
+        <ns0:srgbClr val="FF6392"/>
       </ns0:accent5>
       <ns0:accent6>
-        <ns0:srgbClr val="4EA72E"/>
+        <ns0:srgbClr val="144F79"/>
       </ns0:accent6>
       <ns0:hlink>
-        <ns0:srgbClr val="467886"/>
+        <ns0:srgbClr val="1D6FA8"/>
       </ns0:hlink>
       <ns0:folHlink>
-        <ns0:srgbClr val="96607D"/>
+        <ns0:srgbClr val="355A78"/>
       </ns0:folHlink>
     </ns0:clrScheme>
     <ns0:fontScheme name="Office">

--- a/sample/showcase.pptx
+++ b/sample/showcase.pptx
@@ -3835,7 +3835,7 @@
                   <a:schemeClr val="accent6"/>
                 </a:solidFill>
               </a:rPr>
-              <a:t>md-to-pptx</a:t>
+              <a:t>markdown-pptx</a:t>
             </a:r>
             <a:endParaRPr>
               <a:solidFill>
@@ -4166,7 +4166,7 @@
                   <a:schemeClr val="dk1"/>
                 </a:solidFill>
               </a:rPr>
-              <a:t>md-to-pptx</a:t>
+              <a:t>markdown-pptx</a:t>
             </a:r>
             <a:r>
               <a:rPr b="0" i="0">
@@ -4899,7 +4899,7 @@
                   <a:schemeClr val="accent1"/>
                 </a:solidFill>
               </a:rPr>
-              <a:t>md-to-pptx keeps the source format simple enough to read directly while still producing a real presentation.</a:t>
+              <a:t>markdown-pptx keeps the source format simple enough to read directly while still producing a real presentation.</a:t>
             </a:r>
           </a:p>
         </p:txBody>
@@ -4994,7 +4994,7 @@
                   <a:schemeClr val="dk1"/>
                 </a:solidFill>
               </a:rPr>
-              <a:t>md-to-pptx sample/showcase.md sample/showcase.pptx --force</a:t>
+              <a:t>markdown-pptx sample/showcase.md sample/showcase.pptx --force</a:t>
             </a:r>
             <a:endParaRPr>
               <a:solidFill>
@@ -5250,7 +5250,7 @@
                   <a:schemeClr val="accent6"/>
                 </a:solidFill>
               </a:rPr>
-              <a:t>What md-to-pptx is</a:t>
+              <a:t>What markdown-pptx is</a:t>
             </a:r>
             <a:endParaRPr>
               <a:solidFill>
@@ -5301,7 +5301,7 @@
                   <a:schemeClr val="dk1"/>
                 </a:solidFill>
               </a:rPr>
-              <a:t>md-to-pptx</a:t>
+              <a:t>markdown-pptx</a:t>
             </a:r>
             <a:r>
               <a:rPr b="0" i="0">
@@ -6311,7 +6311,7 @@
                   <a:schemeClr val="dk1"/>
                 </a:solidFill>
               </a:rPr>
-              <a:t>md-to-pptx deck.md</a:t>
+              <a:t>markdown-pptx deck.md</a:t>
             </a:r>
             <a:r>
               <a:rPr b="0" i="0">
@@ -6386,7 +6386,7 @@
                   <a:schemeClr val="dk1"/>
                 </a:solidFill>
               </a:rPr>
-              <a:t>md-to-pptx deck.md out.pptx</a:t>
+              <a:t>markdown-pptx deck.md out.pptx</a:t>
             </a:r>
             <a:r>
               <a:rPr b="0" i="0">
@@ -7009,7 +7009,7 @@
                   <a:schemeClr val="dk1"/>
                 </a:solidFill>
               </a:rPr>
-              <a:t>md-to-pptx</a:t>
+              <a:t>markdown-pptx</a:t>
             </a:r>
             <a:r>
               <a:rPr b="0" i="0">
